--- a/ppt-master-main/skills/ppt-master/projects/ai_nav_demo_ppt169_20260806/exports/ai_nav_demo_20260806_204315.pptx
+++ b/ppt-master-main/skills/ppt-master/projects/ai_nav_demo_ppt169_20260806/exports/ai_nav_demo_20260806_204315.pptx
@@ -1,16 +1,16 @@
 
 <file path=ppt/presentation.xml><?xml version="1.0" encoding="utf-8"?>
-<p:presentation xmlns:a="http://schemas.openxmlformats.org/drawingml/2006/main" xmlns:r="http://schemas.openxmlformats.org/officeDocument/2006/relationships" xmlns:p="http://schemas.openxmlformats.org/presentationml/2006/main" saveSubsetFonts="1" autoCompressPictures="0">
+<p:presentation xmlns:a="http://schemas.openxmlformats.org/drawingml/2006/main" xmlns:r="http://schemas.openxmlformats.org/officeDocument/2006/relationships" xmlns:p="http://schemas.openxmlformats.org/presentationml/2006/main" autoCompressPictures="0">
   <p:sldMasterIdLst>
     <p:sldMasterId id="2147483648" r:id="rId1"/>
   </p:sldMasterIdLst>
   <p:sldIdLst>
-    <p:sldId id="256" r:id="rId7"/>
-    <p:sldId id="257" r:id="rId8"/>
-    <p:sldId id="258" r:id="rId9"/>
-    <p:sldId id="259" r:id="rId10"/>
-    <p:sldId id="260" r:id="rId11"/>
-    <p:sldId id="261" r:id="rId12"/>
+    <p:sldId id="256" r:id="rId3"/>
+    <p:sldId id="257" r:id="rId4"/>
+    <p:sldId id="258" r:id="rId5"/>
+    <p:sldId id="259" r:id="rId6"/>
+    <p:sldId id="260" r:id="rId7"/>
+    <p:sldId id="261" r:id="rId8"/>
   </p:sldIdLst>
   <p:sldSz cx="12192000" cy="6858000" type="screen4x3"/>
   <p:notesSz cx="6858000" cy="9144000"/>
@@ -109,11 +109,27 @@
       </a:defRPr>
     </a:lvl9pPr>
   </p:defaultTextStyle>
+  <p:extLst>
+    <p:ext uri="{EFAFB233-063F-42B5-8137-9DF3F51BA10A}">
+      <p15:sldGuideLst xmlns:p15="http://schemas.microsoft.com/office/powerpoint/2012/main">
+        <p15:guide id="1" orient="horz" pos="2160" userDrawn="1">
+          <p15:clr>
+            <a:srgbClr val="A4A3A4"/>
+          </p15:clr>
+        </p15:guide>
+        <p15:guide id="2" pos="2880" userDrawn="1">
+          <p15:clr>
+            <a:srgbClr val="A4A3A4"/>
+          </p15:clr>
+        </p15:guide>
+      </p15:sldGuideLst>
+    </p:ext>
+  </p:extLst>
 </p:presentation>
 </file>
 
-<file path=ppt/slideLayouts/slideLayout7.xml><?xml version="1.0" encoding="utf-8"?>
-<p:sldLayout xmlns:a="http://schemas.openxmlformats.org/drawingml/2006/main" xmlns:p="http://schemas.openxmlformats.org/presentationml/2006/main" type="blank" preserve="1">
+<file path=ppt/slideLayouts/slideLayout1.xml><?xml version="1.0" encoding="utf-8"?>
+<p:sldLayout xmlns:a="http://schemas.openxmlformats.org/drawingml/2006/main" xmlns:r="http://schemas.openxmlformats.org/officeDocument/2006/relationships" xmlns:p="http://schemas.openxmlformats.org/presentationml/2006/main" type="blank" preserve="1">
   <p:cSld name="ai_nav_demo — Blank">
     <p:spTree>
       <p:nvGrpSpPr>
@@ -146,7 +162,6 @@
           <a:p>
             <a:fld id="{5BCAD085-E8A6-8845-BD4E-CB4CCA059FC4}" type="datetimeFigureOut">
               <a:rPr lang="en-US" smtClean="0"/>
-              <a:t>1/27/13</a:t>
             </a:fld>
             <a:endParaRPr lang="en-US"/>
           </a:p>
@@ -188,7 +203,6 @@
           <a:p>
             <a:fld id="{C1FF6DA9-008F-8B48-92A6-B652298478BF}" type="slidenum">
               <a:rPr lang="en-US" smtClean="0"/>
-              <a:t>‹#›</a:t>
             </a:fld>
             <a:endParaRPr lang="en-US"/>
           </a:p>
@@ -203,8 +217,8 @@
 </file>
 
 <file path=ppt/slideMasters/slideMaster1.xml><?xml version="1.0" encoding="utf-8"?>
-<p:sldMaster xmlns:a="http://schemas.openxmlformats.org/drawingml/2006/main" xmlns:p="http://schemas.openxmlformats.org/presentationml/2006/main" xmlns:r="http://schemas.openxmlformats.org/officeDocument/2006/relationships">
-  <p:cSld name="ai_nav_demo — Master">
+<p:sldMaster xmlns:a="http://schemas.openxmlformats.org/drawingml/2006/main" xmlns:r="http://schemas.openxmlformats.org/officeDocument/2006/relationships" xmlns:p="http://schemas.openxmlformats.org/presentationml/2006/main">
+  <p:cSld>
     <p:bg>
       <p:bgRef idx="1001">
         <a:schemeClr val="bg1"/>
@@ -259,7 +273,6 @@
           <a:p>
             <a:fld id="{5BCAD085-E8A6-8845-BD4E-CB4CCA059FC4}" type="datetimeFigureOut">
               <a:rPr lang="en-US" smtClean="0"/>
-              <a:t>1/27/13</a:t>
             </a:fld>
             <a:endParaRPr lang="en-US"/>
           </a:p>
@@ -337,7 +350,6 @@
           <a:p>
             <a:fld id="{C1FF6DA9-008F-8B48-92A6-B652298478BF}" type="slidenum">
               <a:rPr lang="en-US" smtClean="0"/>
-              <a:t>‹#›</a:t>
             </a:fld>
             <a:endParaRPr lang="en-US"/>
           </a:p>
@@ -347,7 +359,7 @@
   </p:cSld>
   <p:clrMap bg1="lt1" tx1="dk1" bg2="lt2" tx2="dk2" accent1="accent1" accent2="accent2" accent3="accent3" accent4="accent4" accent5="accent5" accent6="accent6" hlink="hlink" folHlink="folHlink"/>
   <p:sldLayoutIdLst>
-    <p:sldLayoutId id="2147483655" r:id="rId7"/>
+    <p:sldLayoutId id="2147483649" r:id="rId1"/>
   </p:sldLayoutIdLst>
   <p:txStyles>
     <p:titleStyle>
@@ -371,7 +383,7 @@
         <a:spcBef>
           <a:spcPct val="20000"/>
         </a:spcBef>
-        <a:buFont typeface="Arial"/>
+        <a:buFont typeface="Arial" panose="020B0604020202090204"/>
         <a:buChar char="•"/>
         <a:defRPr sz="3200" kern="1200">
           <a:solidFill>
@@ -386,7 +398,7 @@
         <a:spcBef>
           <a:spcPct val="20000"/>
         </a:spcBef>
-        <a:buFont typeface="Arial"/>
+        <a:buFont typeface="Arial" panose="020B0604020202090204"/>
         <a:buChar char="–"/>
         <a:defRPr sz="2800" kern="1200">
           <a:solidFill>
@@ -401,7 +413,7 @@
         <a:spcBef>
           <a:spcPct val="20000"/>
         </a:spcBef>
-        <a:buFont typeface="Arial"/>
+        <a:buFont typeface="Arial" panose="020B0604020202090204"/>
         <a:buChar char="•"/>
         <a:defRPr sz="2400" kern="1200">
           <a:solidFill>
@@ -416,7 +428,7 @@
         <a:spcBef>
           <a:spcPct val="20000"/>
         </a:spcBef>
-        <a:buFont typeface="Arial"/>
+        <a:buFont typeface="Arial" panose="020B0604020202090204"/>
         <a:buChar char="–"/>
         <a:defRPr sz="2000" kern="1200">
           <a:solidFill>
@@ -431,7 +443,7 @@
         <a:spcBef>
           <a:spcPct val="20000"/>
         </a:spcBef>
-        <a:buFont typeface="Arial"/>
+        <a:buFont typeface="Arial" panose="020B0604020202090204"/>
         <a:buChar char="»"/>
         <a:defRPr sz="2000" kern="1200">
           <a:solidFill>
@@ -446,7 +458,7 @@
         <a:spcBef>
           <a:spcPct val="20000"/>
         </a:spcBef>
-        <a:buFont typeface="Arial"/>
+        <a:buFont typeface="Arial" panose="020B0604020202090204"/>
         <a:buChar char="•"/>
         <a:defRPr sz="2000" kern="1200">
           <a:solidFill>
@@ -461,7 +473,7 @@
         <a:spcBef>
           <a:spcPct val="20000"/>
         </a:spcBef>
-        <a:buFont typeface="Arial"/>
+        <a:buFont typeface="Arial" panose="020B0604020202090204"/>
         <a:buChar char="•"/>
         <a:defRPr sz="2000" kern="1200">
           <a:solidFill>
@@ -476,7 +488,7 @@
         <a:spcBef>
           <a:spcPct val="20000"/>
         </a:spcBef>
-        <a:buFont typeface="Arial"/>
+        <a:buFont typeface="Arial" panose="020B0604020202090204"/>
         <a:buChar char="•"/>
         <a:defRPr sz="2000" kern="1200">
           <a:solidFill>
@@ -491,7 +503,7 @@
         <a:spcBef>
           <a:spcPct val="20000"/>
         </a:spcBef>
-        <a:buFont typeface="Arial"/>
+        <a:buFont typeface="Arial" panose="020B0604020202090204"/>
         <a:buChar char="•"/>
         <a:defRPr sz="2000" kern="1200">
           <a:solidFill>
@@ -714,6 +726,14 @@
                   </a:rPr>
                   <a:t>01</a:t>
                 </a:r>
+                <a:endParaRPr lang="en-US" sz="1050" b="1" dirty="0">
+                  <a:solidFill>
+                    <a:srgbClr val="FFFFFF"/>
+                  </a:solidFill>
+                  <a:latin typeface="Segoe UI"/>
+                  <a:ea typeface="Segoe UI"/>
+                  <a:cs typeface="Segoe UI"/>
+                </a:endParaRPr>
               </a:p>
             </p:txBody>
           </p:sp>
@@ -749,11 +769,19 @@
                       <a:srgbClr val="1E293B"/>
                     </a:solidFill>
                     <a:latin typeface="Segoe UI"/>
-                    <a:ea typeface="Microsoft YaHei"/>
+                    <a:ea typeface="微软雅黑"/>
                     <a:cs typeface="Segoe UI"/>
                   </a:rPr>
                   <a:t>核心问题</a:t>
                 </a:r>
+                <a:endParaRPr lang="zh-CN" sz="1050" b="1" dirty="0">
+                  <a:solidFill>
+                    <a:srgbClr val="1E293B"/>
+                  </a:solidFill>
+                  <a:latin typeface="Segoe UI"/>
+                  <a:ea typeface="微软雅黑"/>
+                  <a:cs typeface="Segoe UI"/>
+                </a:endParaRPr>
               </a:p>
             </p:txBody>
           </p:sp>
@@ -867,6 +895,14 @@
                   </a:rPr>
                   <a:t>02</a:t>
                 </a:r>
+                <a:endParaRPr lang="en-US" sz="900" b="1" dirty="0">
+                  <a:solidFill>
+                    <a:srgbClr val="FFFFFF"/>
+                  </a:solidFill>
+                  <a:latin typeface="Segoe UI"/>
+                  <a:ea typeface="Segoe UI"/>
+                  <a:cs typeface="Segoe UI"/>
+                </a:endParaRPr>
               </a:p>
             </p:txBody>
           </p:sp>
@@ -902,11 +938,19 @@
                       <a:srgbClr val="64748B"/>
                     </a:solidFill>
                     <a:latin typeface="Segoe UI"/>
-                    <a:ea typeface="Microsoft YaHei"/>
+                    <a:ea typeface="微软雅黑"/>
                     <a:cs typeface="Segoe UI"/>
                   </a:rPr>
                   <a:t>数据来源与</a:t>
                 </a:r>
+                <a:endParaRPr lang="zh-CN" sz="980" dirty="0">
+                  <a:solidFill>
+                    <a:srgbClr val="64748B"/>
+                  </a:solidFill>
+                  <a:latin typeface="Segoe UI"/>
+                  <a:ea typeface="微软雅黑"/>
+                  <a:cs typeface="Segoe UI"/>
+                </a:endParaRPr>
               </a:p>
             </p:txBody>
           </p:sp>
@@ -942,11 +986,19 @@
                       <a:srgbClr val="64748B"/>
                     </a:solidFill>
                     <a:latin typeface="Segoe UI"/>
-                    <a:ea typeface="Microsoft YaHei"/>
+                    <a:ea typeface="微软雅黑"/>
                     <a:cs typeface="Segoe UI"/>
                   </a:rPr>
                   <a:t>利用方式</a:t>
                 </a:r>
+                <a:endParaRPr lang="zh-CN" sz="980" dirty="0">
+                  <a:solidFill>
+                    <a:srgbClr val="64748B"/>
+                  </a:solidFill>
+                  <a:latin typeface="Segoe UI"/>
+                  <a:ea typeface="微软雅黑"/>
+                  <a:cs typeface="Segoe UI"/>
+                </a:endParaRPr>
               </a:p>
             </p:txBody>
           </p:sp>
@@ -1024,6 +1076,14 @@
                   </a:rPr>
                   <a:t>03</a:t>
                 </a:r>
+                <a:endParaRPr lang="en-US" sz="900" b="1" dirty="0">
+                  <a:solidFill>
+                    <a:srgbClr val="FFFFFF"/>
+                  </a:solidFill>
+                  <a:latin typeface="Segoe UI"/>
+                  <a:ea typeface="Segoe UI"/>
+                  <a:cs typeface="Segoe UI"/>
+                </a:endParaRPr>
               </a:p>
             </p:txBody>
           </p:sp>
@@ -1059,11 +1119,19 @@
                       <a:srgbClr val="64748B"/>
                     </a:solidFill>
                     <a:latin typeface="Segoe UI"/>
-                    <a:ea typeface="Microsoft YaHei"/>
+                    <a:ea typeface="微软雅黑"/>
                     <a:cs typeface="Segoe UI"/>
                   </a:rPr>
                   <a:t>技术方案与</a:t>
                 </a:r>
+                <a:endParaRPr lang="zh-CN" sz="980" dirty="0">
+                  <a:solidFill>
+                    <a:srgbClr val="64748B"/>
+                  </a:solidFill>
+                  <a:latin typeface="Segoe UI"/>
+                  <a:ea typeface="微软雅黑"/>
+                  <a:cs typeface="Segoe UI"/>
+                </a:endParaRPr>
               </a:p>
             </p:txBody>
           </p:sp>
@@ -1099,11 +1167,19 @@
                       <a:srgbClr val="64748B"/>
                     </a:solidFill>
                     <a:latin typeface="Segoe UI"/>
-                    <a:ea typeface="Microsoft YaHei"/>
+                    <a:ea typeface="微软雅黑"/>
                     <a:cs typeface="Segoe UI"/>
                   </a:rPr>
                   <a:t>创新点</a:t>
                 </a:r>
+                <a:endParaRPr lang="zh-CN" sz="980" dirty="0">
+                  <a:solidFill>
+                    <a:srgbClr val="64748B"/>
+                  </a:solidFill>
+                  <a:latin typeface="Segoe UI"/>
+                  <a:ea typeface="微软雅黑"/>
+                  <a:cs typeface="Segoe UI"/>
+                </a:endParaRPr>
               </a:p>
             </p:txBody>
           </p:sp>
@@ -1117,9 +1193,9 @@
           <p:grpSpPr>
             <a:xfrm>
               <a:off x="6324600" y="371475"/>
-              <a:ext cx="894613" cy="352139"/>
+              <a:ext cx="894613" cy="311944"/>
               <a:chOff x="6324600" y="371475"/>
-              <a:chExt cx="894613" cy="352139"/>
+              <a:chExt cx="894613" cy="311944"/>
             </a:xfrm>
           </p:grpSpPr>
           <p:sp>
@@ -1181,6 +1257,14 @@
                   </a:rPr>
                   <a:t>04</a:t>
                 </a:r>
+                <a:endParaRPr lang="en-US" sz="900" b="1" dirty="0">
+                  <a:solidFill>
+                    <a:srgbClr val="FFFFFF"/>
+                  </a:solidFill>
+                  <a:latin typeface="Segoe UI"/>
+                  <a:ea typeface="Segoe UI"/>
+                  <a:cs typeface="Segoe UI"/>
+                </a:endParaRPr>
               </a:p>
             </p:txBody>
           </p:sp>
@@ -1216,11 +1300,19 @@
                       <a:srgbClr val="64748B"/>
                     </a:solidFill>
                     <a:latin typeface="Segoe UI"/>
-                    <a:ea typeface="Microsoft YaHei"/>
+                    <a:ea typeface="微软雅黑"/>
                     <a:cs typeface="Segoe UI"/>
                   </a:rPr>
                   <a:t>应用规模</a:t>
                 </a:r>
+                <a:endParaRPr lang="zh-CN" sz="980" dirty="0">
+                  <a:solidFill>
+                    <a:srgbClr val="64748B"/>
+                  </a:solidFill>
+                  <a:latin typeface="Segoe UI"/>
+                  <a:ea typeface="微软雅黑"/>
+                  <a:cs typeface="Segoe UI"/>
+                </a:endParaRPr>
               </a:p>
             </p:txBody>
           </p:sp>
@@ -1233,7 +1325,7 @@
             <p:spPr>
               <a:xfrm>
                 <a:off x="6681597" y="532924"/>
-                <a:ext cx="273761" cy="190690"/>
+                <a:ext cx="248920" cy="150495"/>
               </a:xfrm>
               <a:prstGeom prst="rect">
                 <a:avLst/>
@@ -1256,11 +1348,19 @@
                       <a:srgbClr val="64748B"/>
                     </a:solidFill>
                     <a:latin typeface="Segoe UI"/>
-                    <a:ea typeface="Microsoft YaHei"/>
-                    <a:cs typeface="Segoe UI"/>
-                  </a:rPr>
-                  <a:t>范本</a:t>
-                </a:r>
+                    <a:ea typeface="微软雅黑"/>
+                    <a:cs typeface="Segoe UI"/>
+                  </a:rPr>
+                  <a:t>范围</a:t>
+                </a:r>
+                <a:endParaRPr lang="zh-CN" sz="980" dirty="0">
+                  <a:solidFill>
+                    <a:srgbClr val="64748B"/>
+                  </a:solidFill>
+                  <a:latin typeface="Segoe UI"/>
+                  <a:ea typeface="微软雅黑"/>
+                  <a:cs typeface="Segoe UI"/>
+                </a:endParaRPr>
               </a:p>
             </p:txBody>
           </p:sp>
@@ -1338,6 +1438,14 @@
                   </a:rPr>
                   <a:t>05</a:t>
                 </a:r>
+                <a:endParaRPr lang="en-US" sz="900" b="1" dirty="0">
+                  <a:solidFill>
+                    <a:srgbClr val="FFFFFF"/>
+                  </a:solidFill>
+                  <a:latin typeface="Segoe UI"/>
+                  <a:ea typeface="Segoe UI"/>
+                  <a:cs typeface="Segoe UI"/>
+                </a:endParaRPr>
               </a:p>
             </p:txBody>
           </p:sp>
@@ -1373,11 +1481,19 @@
                       <a:srgbClr val="64748B"/>
                     </a:solidFill>
                     <a:latin typeface="Segoe UI"/>
-                    <a:ea typeface="Microsoft YaHei"/>
+                    <a:ea typeface="微软雅黑"/>
                     <a:cs typeface="Segoe UI"/>
                   </a:rPr>
                   <a:t>应用效果与</a:t>
                 </a:r>
+                <a:endParaRPr lang="zh-CN" sz="980" dirty="0">
+                  <a:solidFill>
+                    <a:srgbClr val="64748B"/>
+                  </a:solidFill>
+                  <a:latin typeface="Segoe UI"/>
+                  <a:ea typeface="微软雅黑"/>
+                  <a:cs typeface="Segoe UI"/>
+                </a:endParaRPr>
               </a:p>
             </p:txBody>
           </p:sp>
@@ -1413,11 +1529,19 @@
                       <a:srgbClr val="64748B"/>
                     </a:solidFill>
                     <a:latin typeface="Segoe UI"/>
-                    <a:ea typeface="Microsoft YaHei"/>
+                    <a:ea typeface="微软雅黑"/>
                     <a:cs typeface="Segoe UI"/>
                   </a:rPr>
                   <a:t>量化成效</a:t>
                 </a:r>
+                <a:endParaRPr lang="zh-CN" sz="980" dirty="0">
+                  <a:solidFill>
+                    <a:srgbClr val="64748B"/>
+                  </a:solidFill>
+                  <a:latin typeface="Segoe UI"/>
+                  <a:ea typeface="微软雅黑"/>
+                  <a:cs typeface="Segoe UI"/>
+                </a:endParaRPr>
               </a:p>
             </p:txBody>
           </p:sp>
@@ -1495,6 +1619,14 @@
                   </a:rPr>
                   <a:t>06</a:t>
                 </a:r>
+                <a:endParaRPr lang="en-US" sz="900" b="1" dirty="0">
+                  <a:solidFill>
+                    <a:srgbClr val="FFFFFF"/>
+                  </a:solidFill>
+                  <a:latin typeface="Segoe UI"/>
+                  <a:ea typeface="Segoe UI"/>
+                  <a:cs typeface="Segoe UI"/>
+                </a:endParaRPr>
               </a:p>
             </p:txBody>
           </p:sp>
@@ -1530,11 +1662,19 @@
                       <a:srgbClr val="64748B"/>
                     </a:solidFill>
                     <a:latin typeface="Segoe UI"/>
-                    <a:ea typeface="Microsoft YaHei"/>
+                    <a:ea typeface="微软雅黑"/>
                     <a:cs typeface="Segoe UI"/>
                   </a:rPr>
                   <a:t>应用价值与</a:t>
                 </a:r>
+                <a:endParaRPr lang="zh-CN" sz="980" dirty="0">
+                  <a:solidFill>
+                    <a:srgbClr val="64748B"/>
+                  </a:solidFill>
+                  <a:latin typeface="Segoe UI"/>
+                  <a:ea typeface="微软雅黑"/>
+                  <a:cs typeface="Segoe UI"/>
+                </a:endParaRPr>
               </a:p>
             </p:txBody>
           </p:sp>
@@ -1570,11 +1710,19 @@
                       <a:srgbClr val="64748B"/>
                     </a:solidFill>
                     <a:latin typeface="Segoe UI"/>
-                    <a:ea typeface="Microsoft YaHei"/>
+                    <a:ea typeface="微软雅黑"/>
                     <a:cs typeface="Segoe UI"/>
                   </a:rPr>
                   <a:t>市场前景</a:t>
                 </a:r>
+                <a:endParaRPr lang="zh-CN" sz="980" dirty="0">
+                  <a:solidFill>
+                    <a:srgbClr val="64748B"/>
+                  </a:solidFill>
+                  <a:latin typeface="Segoe UI"/>
+                  <a:ea typeface="微软雅黑"/>
+                  <a:cs typeface="Segoe UI"/>
+                </a:endParaRPr>
               </a:p>
             </p:txBody>
           </p:sp>
@@ -1585,9 +1733,18 @@
   <p:clrMapOvr>
     <a:masterClrMapping/>
   </p:clrMapOvr>
-  <p:transition xmlns:p14="http://schemas.microsoft.com/office/powerpoint/2010/main" p14:dur="400">
-    <p:fade/>
-  </p:transition>
+  <mc:AlternateContent xmlns:mc="http://schemas.openxmlformats.org/markup-compatibility/2006">
+    <mc:Choice xmlns:p14="http://schemas.microsoft.com/office/powerpoint/2010/main" Requires="p14">
+      <p:transition p14:dur="400">
+        <p:fade/>
+      </p:transition>
+    </mc:Choice>
+    <mc:Fallback>
+      <p:transition>
+        <p:fade/>
+      </p:transition>
+    </mc:Fallback>
+  </mc:AlternateContent>
 </p:sld>
 </file>
 
@@ -1703,6 +1860,14 @@
                   </a:rPr>
                   <a:t>01</a:t>
                 </a:r>
+                <a:endParaRPr lang="en-US" sz="900" b="1" dirty="0">
+                  <a:solidFill>
+                    <a:srgbClr val="FFFFFF"/>
+                  </a:solidFill>
+                  <a:latin typeface="Segoe UI"/>
+                  <a:ea typeface="Segoe UI"/>
+                  <a:cs typeface="Segoe UI"/>
+                </a:endParaRPr>
               </a:p>
             </p:txBody>
           </p:sp>
@@ -1714,7 +1879,7 @@
             </p:nvSpPr>
             <p:spPr>
               <a:xfrm>
-                <a:off x="966597" y="390049"/>
+                <a:off x="966597" y="450374"/>
                 <a:ext cx="537616" cy="190690"/>
               </a:xfrm>
               <a:prstGeom prst="rect">
@@ -1738,11 +1903,19 @@
                       <a:srgbClr val="64748B"/>
                     </a:solidFill>
                     <a:latin typeface="Segoe UI"/>
-                    <a:ea typeface="Microsoft YaHei"/>
+                    <a:ea typeface="微软雅黑"/>
                     <a:cs typeface="Segoe UI"/>
                   </a:rPr>
                   <a:t>核心问题</a:t>
                 </a:r>
+                <a:endParaRPr lang="zh-CN" sz="980" dirty="0">
+                  <a:solidFill>
+                    <a:srgbClr val="64748B"/>
+                  </a:solidFill>
+                  <a:latin typeface="Segoe UI"/>
+                  <a:ea typeface="微软雅黑"/>
+                  <a:cs typeface="Segoe UI"/>
+                </a:endParaRPr>
               </a:p>
             </p:txBody>
           </p:sp>
@@ -1756,9 +1929,9 @@
           <p:grpSpPr>
             <a:xfrm>
               <a:off x="2495550" y="352425"/>
-              <a:ext cx="1157002" cy="390525"/>
+              <a:ext cx="1351291" cy="390525"/>
               <a:chOff x="2495550" y="352425"/>
-              <a:chExt cx="1157002" cy="390525"/>
+              <a:chExt cx="1351291" cy="390525"/>
             </a:xfrm>
           </p:grpSpPr>
           <p:sp>
@@ -1820,6 +1993,14 @@
                   </a:rPr>
                   <a:t>02</a:t>
                 </a:r>
+                <a:endParaRPr lang="en-US" sz="1050" b="1" dirty="0">
+                  <a:solidFill>
+                    <a:srgbClr val="FFFFFF"/>
+                  </a:solidFill>
+                  <a:latin typeface="Segoe UI"/>
+                  <a:ea typeface="Segoe UI"/>
+                  <a:cs typeface="Segoe UI"/>
+                </a:endParaRPr>
               </a:p>
             </p:txBody>
           </p:sp>
@@ -1831,8 +2012,8 @@
             </p:nvSpPr>
             <p:spPr>
               <a:xfrm>
-                <a:off x="2899791" y="381952"/>
-                <a:ext cx="752761" cy="205359"/>
+                <a:off x="2908946" y="390207"/>
+                <a:ext cx="937895" cy="161290"/>
               </a:xfrm>
               <a:prstGeom prst="rect">
                 <a:avLst/>
@@ -1855,11 +2036,30 @@
                       <a:srgbClr val="1E293B"/>
                     </a:solidFill>
                     <a:latin typeface="Segoe UI"/>
-                    <a:ea typeface="Microsoft YaHei"/>
+                    <a:ea typeface="微软雅黑"/>
                     <a:cs typeface="Segoe UI"/>
                   </a:rPr>
                   <a:t>数据来源与</a:t>
                 </a:r>
+                <a:r>
+                  <a:rPr lang="zh-CN" sz="1050" b="1" dirty="0">
+                    <a:solidFill>
+                      <a:srgbClr val="1E293B"/>
+                    </a:solidFill>
+                    <a:latin typeface="Segoe UI"/>
+                    <a:ea typeface="微软雅黑"/>
+                    <a:cs typeface="Segoe UI"/>
+                  </a:rPr>
+                  <a:t>要素</a:t>
+                </a:r>
+                <a:endParaRPr lang="zh-CN" sz="1050" b="1" dirty="0">
+                  <a:solidFill>
+                    <a:srgbClr val="1E293B"/>
+                  </a:solidFill>
+                  <a:latin typeface="Segoe UI"/>
+                  <a:ea typeface="微软雅黑"/>
+                  <a:cs typeface="Segoe UI"/>
+                </a:endParaRPr>
               </a:p>
             </p:txBody>
           </p:sp>
@@ -1895,11 +2095,19 @@
                       <a:srgbClr val="1E293B"/>
                     </a:solidFill>
                     <a:latin typeface="Segoe UI"/>
-                    <a:ea typeface="Microsoft YaHei"/>
+                    <a:ea typeface="微软雅黑"/>
                     <a:cs typeface="Segoe UI"/>
                   </a:rPr>
                   <a:t>利用方式</a:t>
                 </a:r>
+                <a:endParaRPr lang="zh-CN" sz="1050" b="1" dirty="0">
+                  <a:solidFill>
+                    <a:srgbClr val="1E293B"/>
+                  </a:solidFill>
+                  <a:latin typeface="Segoe UI"/>
+                  <a:ea typeface="微软雅黑"/>
+                  <a:cs typeface="Segoe UI"/>
+                </a:endParaRPr>
               </a:p>
             </p:txBody>
           </p:sp>
@@ -2013,6 +2221,14 @@
                   </a:rPr>
                   <a:t>03</a:t>
                 </a:r>
+                <a:endParaRPr lang="en-US" sz="900" b="1" dirty="0">
+                  <a:solidFill>
+                    <a:srgbClr val="FFFFFF"/>
+                  </a:solidFill>
+                  <a:latin typeface="Segoe UI"/>
+                  <a:ea typeface="Segoe UI"/>
+                  <a:cs typeface="Segoe UI"/>
+                </a:endParaRPr>
               </a:p>
             </p:txBody>
           </p:sp>
@@ -2048,11 +2264,19 @@
                       <a:srgbClr val="64748B"/>
                     </a:solidFill>
                     <a:latin typeface="Segoe UI"/>
-                    <a:ea typeface="Microsoft YaHei"/>
+                    <a:ea typeface="微软雅黑"/>
                     <a:cs typeface="Segoe UI"/>
                   </a:rPr>
                   <a:t>技术方案与</a:t>
                 </a:r>
+                <a:endParaRPr lang="zh-CN" sz="980" dirty="0">
+                  <a:solidFill>
+                    <a:srgbClr val="64748B"/>
+                  </a:solidFill>
+                  <a:latin typeface="Segoe UI"/>
+                  <a:ea typeface="微软雅黑"/>
+                  <a:cs typeface="Segoe UI"/>
+                </a:endParaRPr>
               </a:p>
             </p:txBody>
           </p:sp>
@@ -2088,11 +2312,19 @@
                       <a:srgbClr val="64748B"/>
                     </a:solidFill>
                     <a:latin typeface="Segoe UI"/>
-                    <a:ea typeface="Microsoft YaHei"/>
+                    <a:ea typeface="微软雅黑"/>
                     <a:cs typeface="Segoe UI"/>
                   </a:rPr>
                   <a:t>创新点</a:t>
                 </a:r>
+                <a:endParaRPr lang="zh-CN" sz="980" dirty="0">
+                  <a:solidFill>
+                    <a:srgbClr val="64748B"/>
+                  </a:solidFill>
+                  <a:latin typeface="Segoe UI"/>
+                  <a:ea typeface="微软雅黑"/>
+                  <a:cs typeface="Segoe UI"/>
+                </a:endParaRPr>
               </a:p>
             </p:txBody>
           </p:sp>
@@ -2106,9 +2338,9 @@
           <p:grpSpPr>
             <a:xfrm>
               <a:off x="6324600" y="371475"/>
-              <a:ext cx="894613" cy="352139"/>
+              <a:ext cx="894613" cy="311944"/>
               <a:chOff x="6324600" y="371475"/>
-              <a:chExt cx="894613" cy="352139"/>
+              <a:chExt cx="894613" cy="311944"/>
             </a:xfrm>
           </p:grpSpPr>
           <p:sp>
@@ -2170,6 +2402,14 @@
                   </a:rPr>
                   <a:t>04</a:t>
                 </a:r>
+                <a:endParaRPr lang="en-US" sz="900" b="1" dirty="0">
+                  <a:solidFill>
+                    <a:srgbClr val="FFFFFF"/>
+                  </a:solidFill>
+                  <a:latin typeface="Segoe UI"/>
+                  <a:ea typeface="Segoe UI"/>
+                  <a:cs typeface="Segoe UI"/>
+                </a:endParaRPr>
               </a:p>
             </p:txBody>
           </p:sp>
@@ -2205,11 +2445,19 @@
                       <a:srgbClr val="64748B"/>
                     </a:solidFill>
                     <a:latin typeface="Segoe UI"/>
-                    <a:ea typeface="Microsoft YaHei"/>
+                    <a:ea typeface="微软雅黑"/>
                     <a:cs typeface="Segoe UI"/>
                   </a:rPr>
                   <a:t>应用规模</a:t>
                 </a:r>
+                <a:endParaRPr lang="zh-CN" sz="980" dirty="0">
+                  <a:solidFill>
+                    <a:srgbClr val="64748B"/>
+                  </a:solidFill>
+                  <a:latin typeface="Segoe UI"/>
+                  <a:ea typeface="微软雅黑"/>
+                  <a:cs typeface="Segoe UI"/>
+                </a:endParaRPr>
               </a:p>
             </p:txBody>
           </p:sp>
@@ -2222,7 +2470,7 @@
             <p:spPr>
               <a:xfrm>
                 <a:off x="6681597" y="532924"/>
-                <a:ext cx="273761" cy="190690"/>
+                <a:ext cx="248920" cy="150495"/>
               </a:xfrm>
               <a:prstGeom prst="rect">
                 <a:avLst/>
@@ -2245,11 +2493,19 @@
                       <a:srgbClr val="64748B"/>
                     </a:solidFill>
                     <a:latin typeface="Segoe UI"/>
-                    <a:ea typeface="Microsoft YaHei"/>
-                    <a:cs typeface="Segoe UI"/>
-                  </a:rPr>
-                  <a:t>范本</a:t>
-                </a:r>
+                    <a:ea typeface="微软雅黑"/>
+                    <a:cs typeface="Segoe UI"/>
+                  </a:rPr>
+                  <a:t>范围</a:t>
+                </a:r>
+                <a:endParaRPr lang="zh-CN" sz="980" dirty="0">
+                  <a:solidFill>
+                    <a:srgbClr val="64748B"/>
+                  </a:solidFill>
+                  <a:latin typeface="Segoe UI"/>
+                  <a:ea typeface="微软雅黑"/>
+                  <a:cs typeface="Segoe UI"/>
+                </a:endParaRPr>
               </a:p>
             </p:txBody>
           </p:sp>
@@ -2327,6 +2583,14 @@
                   </a:rPr>
                   <a:t>05</a:t>
                 </a:r>
+                <a:endParaRPr lang="en-US" sz="900" b="1" dirty="0">
+                  <a:solidFill>
+                    <a:srgbClr val="FFFFFF"/>
+                  </a:solidFill>
+                  <a:latin typeface="Segoe UI"/>
+                  <a:ea typeface="Segoe UI"/>
+                  <a:cs typeface="Segoe UI"/>
+                </a:endParaRPr>
               </a:p>
             </p:txBody>
           </p:sp>
@@ -2362,11 +2626,19 @@
                       <a:srgbClr val="64748B"/>
                     </a:solidFill>
                     <a:latin typeface="Segoe UI"/>
-                    <a:ea typeface="Microsoft YaHei"/>
+                    <a:ea typeface="微软雅黑"/>
                     <a:cs typeface="Segoe UI"/>
                   </a:rPr>
                   <a:t>应用效果与</a:t>
                 </a:r>
+                <a:endParaRPr lang="zh-CN" sz="980" dirty="0">
+                  <a:solidFill>
+                    <a:srgbClr val="64748B"/>
+                  </a:solidFill>
+                  <a:latin typeface="Segoe UI"/>
+                  <a:ea typeface="微软雅黑"/>
+                  <a:cs typeface="Segoe UI"/>
+                </a:endParaRPr>
               </a:p>
             </p:txBody>
           </p:sp>
@@ -2402,11 +2674,19 @@
                       <a:srgbClr val="64748B"/>
                     </a:solidFill>
                     <a:latin typeface="Segoe UI"/>
-                    <a:ea typeface="Microsoft YaHei"/>
+                    <a:ea typeface="微软雅黑"/>
                     <a:cs typeface="Segoe UI"/>
                   </a:rPr>
                   <a:t>量化成效</a:t>
                 </a:r>
+                <a:endParaRPr lang="zh-CN" sz="980" dirty="0">
+                  <a:solidFill>
+                    <a:srgbClr val="64748B"/>
+                  </a:solidFill>
+                  <a:latin typeface="Segoe UI"/>
+                  <a:ea typeface="微软雅黑"/>
+                  <a:cs typeface="Segoe UI"/>
+                </a:endParaRPr>
               </a:p>
             </p:txBody>
           </p:sp>
@@ -2484,6 +2764,14 @@
                   </a:rPr>
                   <a:t>06</a:t>
                 </a:r>
+                <a:endParaRPr lang="en-US" sz="900" b="1" dirty="0">
+                  <a:solidFill>
+                    <a:srgbClr val="FFFFFF"/>
+                  </a:solidFill>
+                  <a:latin typeface="Segoe UI"/>
+                  <a:ea typeface="Segoe UI"/>
+                  <a:cs typeface="Segoe UI"/>
+                </a:endParaRPr>
               </a:p>
             </p:txBody>
           </p:sp>
@@ -2519,11 +2807,19 @@
                       <a:srgbClr val="64748B"/>
                     </a:solidFill>
                     <a:latin typeface="Segoe UI"/>
-                    <a:ea typeface="Microsoft YaHei"/>
+                    <a:ea typeface="微软雅黑"/>
                     <a:cs typeface="Segoe UI"/>
                   </a:rPr>
                   <a:t>应用价值与</a:t>
                 </a:r>
+                <a:endParaRPr lang="zh-CN" sz="980" dirty="0">
+                  <a:solidFill>
+                    <a:srgbClr val="64748B"/>
+                  </a:solidFill>
+                  <a:latin typeface="Segoe UI"/>
+                  <a:ea typeface="微软雅黑"/>
+                  <a:cs typeface="Segoe UI"/>
+                </a:endParaRPr>
               </a:p>
             </p:txBody>
           </p:sp>
@@ -2559,11 +2855,19 @@
                       <a:srgbClr val="64748B"/>
                     </a:solidFill>
                     <a:latin typeface="Segoe UI"/>
-                    <a:ea typeface="Microsoft YaHei"/>
+                    <a:ea typeface="微软雅黑"/>
                     <a:cs typeface="Segoe UI"/>
                   </a:rPr>
                   <a:t>市场前景</a:t>
                 </a:r>
+                <a:endParaRPr lang="zh-CN" sz="980" dirty="0">
+                  <a:solidFill>
+                    <a:srgbClr val="64748B"/>
+                  </a:solidFill>
+                  <a:latin typeface="Segoe UI"/>
+                  <a:ea typeface="微软雅黑"/>
+                  <a:cs typeface="Segoe UI"/>
+                </a:endParaRPr>
               </a:p>
             </p:txBody>
           </p:sp>
@@ -2574,9 +2878,18 @@
   <p:clrMapOvr>
     <a:masterClrMapping/>
   </p:clrMapOvr>
-  <p:transition xmlns:p14="http://schemas.microsoft.com/office/powerpoint/2010/main" p14:dur="400">
-    <p:fade/>
-  </p:transition>
+  <mc:AlternateContent xmlns:mc="http://schemas.openxmlformats.org/markup-compatibility/2006">
+    <mc:Choice xmlns:p14="http://schemas.microsoft.com/office/powerpoint/2010/main" Requires="p14">
+      <p:transition p14:dur="400">
+        <p:fade/>
+      </p:transition>
+    </mc:Choice>
+    <mc:Fallback>
+      <p:transition>
+        <p:fade/>
+      </p:transition>
+    </mc:Fallback>
+  </mc:AlternateContent>
 </p:sld>
 </file>
 
@@ -2692,6 +3005,14 @@
                   </a:rPr>
                   <a:t>01</a:t>
                 </a:r>
+                <a:endParaRPr lang="en-US" sz="900" b="1" dirty="0">
+                  <a:solidFill>
+                    <a:srgbClr val="FFFFFF"/>
+                  </a:solidFill>
+                  <a:latin typeface="Segoe UI"/>
+                  <a:ea typeface="Segoe UI"/>
+                  <a:cs typeface="Segoe UI"/>
+                </a:endParaRPr>
               </a:p>
             </p:txBody>
           </p:sp>
@@ -2727,11 +3048,19 @@
                       <a:srgbClr val="64748B"/>
                     </a:solidFill>
                     <a:latin typeface="Segoe UI"/>
-                    <a:ea typeface="Microsoft YaHei"/>
+                    <a:ea typeface="微软雅黑"/>
                     <a:cs typeface="Segoe UI"/>
                   </a:rPr>
                   <a:t>核心问题</a:t>
                 </a:r>
+                <a:endParaRPr lang="zh-CN" sz="980" dirty="0">
+                  <a:solidFill>
+                    <a:srgbClr val="64748B"/>
+                  </a:solidFill>
+                  <a:latin typeface="Segoe UI"/>
+                  <a:ea typeface="微软雅黑"/>
+                  <a:cs typeface="Segoe UI"/>
+                </a:endParaRPr>
               </a:p>
             </p:txBody>
           </p:sp>
@@ -2745,9 +3074,9 @@
           <p:grpSpPr>
             <a:xfrm>
               <a:off x="2514600" y="371475"/>
-              <a:ext cx="1026541" cy="352139"/>
+              <a:ext cx="1268707" cy="352139"/>
               <a:chOff x="2514600" y="371475"/>
-              <a:chExt cx="1026541" cy="352139"/>
+              <a:chExt cx="1268707" cy="352139"/>
             </a:xfrm>
           </p:grpSpPr>
           <p:sp>
@@ -2809,6 +3138,14 @@
                   </a:rPr>
                   <a:t>02</a:t>
                 </a:r>
+                <a:endParaRPr lang="en-US" sz="900" b="1" dirty="0">
+                  <a:solidFill>
+                    <a:srgbClr val="FFFFFF"/>
+                  </a:solidFill>
+                  <a:latin typeface="Segoe UI"/>
+                  <a:ea typeface="Segoe UI"/>
+                  <a:cs typeface="Segoe UI"/>
+                </a:endParaRPr>
               </a:p>
             </p:txBody>
           </p:sp>
@@ -2820,8 +3157,8 @@
             </p:nvSpPr>
             <p:spPr>
               <a:xfrm>
-                <a:off x="2871597" y="390049"/>
-                <a:ext cx="669544" cy="190690"/>
+                <a:off x="2912087" y="390049"/>
+                <a:ext cx="871220" cy="150495"/>
               </a:xfrm>
               <a:prstGeom prst="rect">
                 <a:avLst/>
@@ -2844,11 +3181,30 @@
                       <a:srgbClr val="64748B"/>
                     </a:solidFill>
                     <a:latin typeface="Segoe UI"/>
-                    <a:ea typeface="Microsoft YaHei"/>
+                    <a:ea typeface="微软雅黑"/>
                     <a:cs typeface="Segoe UI"/>
                   </a:rPr>
                   <a:t>数据来源与</a:t>
                 </a:r>
+                <a:r>
+                  <a:rPr lang="zh-CN" sz="980" dirty="0">
+                    <a:solidFill>
+                      <a:srgbClr val="64748B"/>
+                    </a:solidFill>
+                    <a:latin typeface="Segoe UI"/>
+                    <a:ea typeface="微软雅黑"/>
+                    <a:cs typeface="Segoe UI"/>
+                  </a:rPr>
+                  <a:t>要素</a:t>
+                </a:r>
+                <a:endParaRPr lang="zh-CN" sz="980" dirty="0">
+                  <a:solidFill>
+                    <a:srgbClr val="64748B"/>
+                  </a:solidFill>
+                  <a:latin typeface="Segoe UI"/>
+                  <a:ea typeface="微软雅黑"/>
+                  <a:cs typeface="Segoe UI"/>
+                </a:endParaRPr>
               </a:p>
             </p:txBody>
           </p:sp>
@@ -2884,11 +3240,19 @@
                       <a:srgbClr val="64748B"/>
                     </a:solidFill>
                     <a:latin typeface="Segoe UI"/>
-                    <a:ea typeface="Microsoft YaHei"/>
+                    <a:ea typeface="微软雅黑"/>
                     <a:cs typeface="Segoe UI"/>
                   </a:rPr>
                   <a:t>利用方式</a:t>
                 </a:r>
+                <a:endParaRPr lang="zh-CN" sz="980" dirty="0">
+                  <a:solidFill>
+                    <a:srgbClr val="64748B"/>
+                  </a:solidFill>
+                  <a:latin typeface="Segoe UI"/>
+                  <a:ea typeface="微软雅黑"/>
+                  <a:cs typeface="Segoe UI"/>
+                </a:endParaRPr>
               </a:p>
             </p:txBody>
           </p:sp>
@@ -2966,6 +3330,14 @@
                   </a:rPr>
                   <a:t>03</a:t>
                 </a:r>
+                <a:endParaRPr lang="en-US" sz="1050" b="1" dirty="0">
+                  <a:solidFill>
+                    <a:srgbClr val="FFFFFF"/>
+                  </a:solidFill>
+                  <a:latin typeface="Segoe UI"/>
+                  <a:ea typeface="Segoe UI"/>
+                  <a:cs typeface="Segoe UI"/>
+                </a:endParaRPr>
               </a:p>
             </p:txBody>
           </p:sp>
@@ -3001,11 +3373,19 @@
                       <a:srgbClr val="1E293B"/>
                     </a:solidFill>
                     <a:latin typeface="Segoe UI"/>
-                    <a:ea typeface="Microsoft YaHei"/>
+                    <a:ea typeface="微软雅黑"/>
                     <a:cs typeface="Segoe UI"/>
                   </a:rPr>
                   <a:t>技术方案与</a:t>
                 </a:r>
+                <a:endParaRPr lang="zh-CN" sz="1050" b="1" dirty="0">
+                  <a:solidFill>
+                    <a:srgbClr val="1E293B"/>
+                  </a:solidFill>
+                  <a:latin typeface="Segoe UI"/>
+                  <a:ea typeface="微软雅黑"/>
+                  <a:cs typeface="Segoe UI"/>
+                </a:endParaRPr>
               </a:p>
             </p:txBody>
           </p:sp>
@@ -3041,11 +3421,19 @@
                       <a:srgbClr val="1E293B"/>
                     </a:solidFill>
                     <a:latin typeface="Segoe UI"/>
-                    <a:ea typeface="Microsoft YaHei"/>
+                    <a:ea typeface="微软雅黑"/>
                     <a:cs typeface="Segoe UI"/>
                   </a:rPr>
                   <a:t>创新点</a:t>
                 </a:r>
+                <a:endParaRPr lang="zh-CN" sz="1050" b="1" dirty="0">
+                  <a:solidFill>
+                    <a:srgbClr val="1E293B"/>
+                  </a:solidFill>
+                  <a:latin typeface="Segoe UI"/>
+                  <a:ea typeface="微软雅黑"/>
+                  <a:cs typeface="Segoe UI"/>
+                </a:endParaRPr>
               </a:p>
             </p:txBody>
           </p:sp>
@@ -3095,9 +3483,9 @@
           <p:grpSpPr>
             <a:xfrm>
               <a:off x="6324600" y="371475"/>
-              <a:ext cx="894613" cy="352139"/>
+              <a:ext cx="894613" cy="311944"/>
               <a:chOff x="6324600" y="371475"/>
-              <a:chExt cx="894613" cy="352139"/>
+              <a:chExt cx="894613" cy="311944"/>
             </a:xfrm>
           </p:grpSpPr>
           <p:sp>
@@ -3159,6 +3547,14 @@
                   </a:rPr>
                   <a:t>04</a:t>
                 </a:r>
+                <a:endParaRPr lang="en-US" sz="900" b="1" dirty="0">
+                  <a:solidFill>
+                    <a:srgbClr val="FFFFFF"/>
+                  </a:solidFill>
+                  <a:latin typeface="Segoe UI"/>
+                  <a:ea typeface="Segoe UI"/>
+                  <a:cs typeface="Segoe UI"/>
+                </a:endParaRPr>
               </a:p>
             </p:txBody>
           </p:sp>
@@ -3194,11 +3590,19 @@
                       <a:srgbClr val="64748B"/>
                     </a:solidFill>
                     <a:latin typeface="Segoe UI"/>
-                    <a:ea typeface="Microsoft YaHei"/>
+                    <a:ea typeface="微软雅黑"/>
                     <a:cs typeface="Segoe UI"/>
                   </a:rPr>
                   <a:t>应用规模</a:t>
                 </a:r>
+                <a:endParaRPr lang="zh-CN" sz="980" dirty="0">
+                  <a:solidFill>
+                    <a:srgbClr val="64748B"/>
+                  </a:solidFill>
+                  <a:latin typeface="Segoe UI"/>
+                  <a:ea typeface="微软雅黑"/>
+                  <a:cs typeface="Segoe UI"/>
+                </a:endParaRPr>
               </a:p>
             </p:txBody>
           </p:sp>
@@ -3211,7 +3615,7 @@
             <p:spPr>
               <a:xfrm>
                 <a:off x="6681597" y="532924"/>
-                <a:ext cx="273761" cy="190690"/>
+                <a:ext cx="248920" cy="150495"/>
               </a:xfrm>
               <a:prstGeom prst="rect">
                 <a:avLst/>
@@ -3234,11 +3638,19 @@
                       <a:srgbClr val="64748B"/>
                     </a:solidFill>
                     <a:latin typeface="Segoe UI"/>
-                    <a:ea typeface="Microsoft YaHei"/>
-                    <a:cs typeface="Segoe UI"/>
-                  </a:rPr>
-                  <a:t>范本</a:t>
-                </a:r>
+                    <a:ea typeface="微软雅黑"/>
+                    <a:cs typeface="Segoe UI"/>
+                  </a:rPr>
+                  <a:t>范围</a:t>
+                </a:r>
+                <a:endParaRPr lang="zh-CN" sz="980" dirty="0">
+                  <a:solidFill>
+                    <a:srgbClr val="64748B"/>
+                  </a:solidFill>
+                  <a:latin typeface="Segoe UI"/>
+                  <a:ea typeface="微软雅黑"/>
+                  <a:cs typeface="Segoe UI"/>
+                </a:endParaRPr>
               </a:p>
             </p:txBody>
           </p:sp>
@@ -3316,6 +3728,14 @@
                   </a:rPr>
                   <a:t>05</a:t>
                 </a:r>
+                <a:endParaRPr lang="en-US" sz="900" b="1" dirty="0">
+                  <a:solidFill>
+                    <a:srgbClr val="FFFFFF"/>
+                  </a:solidFill>
+                  <a:latin typeface="Segoe UI"/>
+                  <a:ea typeface="Segoe UI"/>
+                  <a:cs typeface="Segoe UI"/>
+                </a:endParaRPr>
               </a:p>
             </p:txBody>
           </p:sp>
@@ -3351,11 +3771,19 @@
                       <a:srgbClr val="64748B"/>
                     </a:solidFill>
                     <a:latin typeface="Segoe UI"/>
-                    <a:ea typeface="Microsoft YaHei"/>
+                    <a:ea typeface="微软雅黑"/>
                     <a:cs typeface="Segoe UI"/>
                   </a:rPr>
                   <a:t>应用效果与</a:t>
                 </a:r>
+                <a:endParaRPr lang="zh-CN" sz="980" dirty="0">
+                  <a:solidFill>
+                    <a:srgbClr val="64748B"/>
+                  </a:solidFill>
+                  <a:latin typeface="Segoe UI"/>
+                  <a:ea typeface="微软雅黑"/>
+                  <a:cs typeface="Segoe UI"/>
+                </a:endParaRPr>
               </a:p>
             </p:txBody>
           </p:sp>
@@ -3391,11 +3819,19 @@
                       <a:srgbClr val="64748B"/>
                     </a:solidFill>
                     <a:latin typeface="Segoe UI"/>
-                    <a:ea typeface="Microsoft YaHei"/>
+                    <a:ea typeface="微软雅黑"/>
                     <a:cs typeface="Segoe UI"/>
                   </a:rPr>
                   <a:t>量化成效</a:t>
                 </a:r>
+                <a:endParaRPr lang="zh-CN" sz="980" dirty="0">
+                  <a:solidFill>
+                    <a:srgbClr val="64748B"/>
+                  </a:solidFill>
+                  <a:latin typeface="Segoe UI"/>
+                  <a:ea typeface="微软雅黑"/>
+                  <a:cs typeface="Segoe UI"/>
+                </a:endParaRPr>
               </a:p>
             </p:txBody>
           </p:sp>
@@ -3473,6 +3909,14 @@
                   </a:rPr>
                   <a:t>06</a:t>
                 </a:r>
+                <a:endParaRPr lang="en-US" sz="900" b="1" dirty="0">
+                  <a:solidFill>
+                    <a:srgbClr val="FFFFFF"/>
+                  </a:solidFill>
+                  <a:latin typeface="Segoe UI"/>
+                  <a:ea typeface="Segoe UI"/>
+                  <a:cs typeface="Segoe UI"/>
+                </a:endParaRPr>
               </a:p>
             </p:txBody>
           </p:sp>
@@ -3508,11 +3952,19 @@
                       <a:srgbClr val="64748B"/>
                     </a:solidFill>
                     <a:latin typeface="Segoe UI"/>
-                    <a:ea typeface="Microsoft YaHei"/>
+                    <a:ea typeface="微软雅黑"/>
                     <a:cs typeface="Segoe UI"/>
                   </a:rPr>
                   <a:t>应用价值与</a:t>
                 </a:r>
+                <a:endParaRPr lang="zh-CN" sz="980" dirty="0">
+                  <a:solidFill>
+                    <a:srgbClr val="64748B"/>
+                  </a:solidFill>
+                  <a:latin typeface="Segoe UI"/>
+                  <a:ea typeface="微软雅黑"/>
+                  <a:cs typeface="Segoe UI"/>
+                </a:endParaRPr>
               </a:p>
             </p:txBody>
           </p:sp>
@@ -3548,11 +4000,19 @@
                       <a:srgbClr val="64748B"/>
                     </a:solidFill>
                     <a:latin typeface="Segoe UI"/>
-                    <a:ea typeface="Microsoft YaHei"/>
+                    <a:ea typeface="微软雅黑"/>
                     <a:cs typeface="Segoe UI"/>
                   </a:rPr>
                   <a:t>市场前景</a:t>
                 </a:r>
+                <a:endParaRPr lang="zh-CN" sz="980" dirty="0">
+                  <a:solidFill>
+                    <a:srgbClr val="64748B"/>
+                  </a:solidFill>
+                  <a:latin typeface="Segoe UI"/>
+                  <a:ea typeface="微软雅黑"/>
+                  <a:cs typeface="Segoe UI"/>
+                </a:endParaRPr>
               </a:p>
             </p:txBody>
           </p:sp>
@@ -3563,9 +4023,18 @@
   <p:clrMapOvr>
     <a:masterClrMapping/>
   </p:clrMapOvr>
-  <p:transition xmlns:p14="http://schemas.microsoft.com/office/powerpoint/2010/main" p14:dur="400">
-    <p:fade/>
-  </p:transition>
+  <mc:AlternateContent xmlns:mc="http://schemas.openxmlformats.org/markup-compatibility/2006">
+    <mc:Choice xmlns:p14="http://schemas.microsoft.com/office/powerpoint/2010/main" Requires="p14">
+      <p:transition p14:dur="400">
+        <p:fade/>
+      </p:transition>
+    </mc:Choice>
+    <mc:Fallback>
+      <p:transition>
+        <p:fade/>
+      </p:transition>
+    </mc:Fallback>
+  </mc:AlternateContent>
 </p:sld>
 </file>
 
@@ -3681,6 +4150,14 @@
                   </a:rPr>
                   <a:t>01</a:t>
                 </a:r>
+                <a:endParaRPr lang="en-US" sz="900" b="1" dirty="0">
+                  <a:solidFill>
+                    <a:srgbClr val="FFFFFF"/>
+                  </a:solidFill>
+                  <a:latin typeface="Segoe UI"/>
+                  <a:ea typeface="Segoe UI"/>
+                  <a:cs typeface="Segoe UI"/>
+                </a:endParaRPr>
               </a:p>
             </p:txBody>
           </p:sp>
@@ -3716,11 +4193,19 @@
                       <a:srgbClr val="64748B"/>
                     </a:solidFill>
                     <a:latin typeface="Segoe UI"/>
-                    <a:ea typeface="Microsoft YaHei"/>
+                    <a:ea typeface="微软雅黑"/>
                     <a:cs typeface="Segoe UI"/>
                   </a:rPr>
                   <a:t>核心问题</a:t>
                 </a:r>
+                <a:endParaRPr lang="zh-CN" sz="980" dirty="0">
+                  <a:solidFill>
+                    <a:srgbClr val="64748B"/>
+                  </a:solidFill>
+                  <a:latin typeface="Segoe UI"/>
+                  <a:ea typeface="微软雅黑"/>
+                  <a:cs typeface="Segoe UI"/>
+                </a:endParaRPr>
               </a:p>
             </p:txBody>
           </p:sp>
@@ -3734,9 +4219,9 @@
           <p:grpSpPr>
             <a:xfrm>
               <a:off x="2514600" y="371475"/>
-              <a:ext cx="1026541" cy="352139"/>
+              <a:ext cx="1254625" cy="352139"/>
               <a:chOff x="2514600" y="371475"/>
-              <a:chExt cx="1026541" cy="352139"/>
+              <a:chExt cx="1254625" cy="352139"/>
             </a:xfrm>
           </p:grpSpPr>
           <p:sp>
@@ -3798,6 +4283,14 @@
                   </a:rPr>
                   <a:t>02</a:t>
                 </a:r>
+                <a:endParaRPr lang="en-US" sz="900" b="1" dirty="0">
+                  <a:solidFill>
+                    <a:srgbClr val="FFFFFF"/>
+                  </a:solidFill>
+                  <a:latin typeface="Segoe UI"/>
+                  <a:ea typeface="Segoe UI"/>
+                  <a:cs typeface="Segoe UI"/>
+                </a:endParaRPr>
               </a:p>
             </p:txBody>
           </p:sp>
@@ -3809,8 +4302,8 @@
             </p:nvSpPr>
             <p:spPr>
               <a:xfrm>
-                <a:off x="2871597" y="390049"/>
-                <a:ext cx="669544" cy="190690"/>
+                <a:off x="2898005" y="390049"/>
+                <a:ext cx="871220" cy="150495"/>
               </a:xfrm>
               <a:prstGeom prst="rect">
                 <a:avLst/>
@@ -3833,11 +4326,30 @@
                       <a:srgbClr val="64748B"/>
                     </a:solidFill>
                     <a:latin typeface="Segoe UI"/>
-                    <a:ea typeface="Microsoft YaHei"/>
+                    <a:ea typeface="微软雅黑"/>
                     <a:cs typeface="Segoe UI"/>
                   </a:rPr>
                   <a:t>数据来源与</a:t>
                 </a:r>
+                <a:r>
+                  <a:rPr lang="zh-CN" sz="980" dirty="0">
+                    <a:solidFill>
+                      <a:srgbClr val="64748B"/>
+                    </a:solidFill>
+                    <a:latin typeface="Segoe UI"/>
+                    <a:ea typeface="微软雅黑"/>
+                    <a:cs typeface="Segoe UI"/>
+                  </a:rPr>
+                  <a:t>要素</a:t>
+                </a:r>
+                <a:endParaRPr lang="zh-CN" sz="980" dirty="0">
+                  <a:solidFill>
+                    <a:srgbClr val="64748B"/>
+                  </a:solidFill>
+                  <a:latin typeface="Segoe UI"/>
+                  <a:ea typeface="微软雅黑"/>
+                  <a:cs typeface="Segoe UI"/>
+                </a:endParaRPr>
               </a:p>
             </p:txBody>
           </p:sp>
@@ -3873,11 +4385,19 @@
                       <a:srgbClr val="64748B"/>
                     </a:solidFill>
                     <a:latin typeface="Segoe UI"/>
-                    <a:ea typeface="Microsoft YaHei"/>
+                    <a:ea typeface="微软雅黑"/>
                     <a:cs typeface="Segoe UI"/>
                   </a:rPr>
                   <a:t>利用方式</a:t>
                 </a:r>
+                <a:endParaRPr lang="zh-CN" sz="980" dirty="0">
+                  <a:solidFill>
+                    <a:srgbClr val="64748B"/>
+                  </a:solidFill>
+                  <a:latin typeface="Segoe UI"/>
+                  <a:ea typeface="微软雅黑"/>
+                  <a:cs typeface="Segoe UI"/>
+                </a:endParaRPr>
               </a:p>
             </p:txBody>
           </p:sp>
@@ -3955,6 +4475,14 @@
                   </a:rPr>
                   <a:t>03</a:t>
                 </a:r>
+                <a:endParaRPr lang="en-US" sz="900" b="1" dirty="0">
+                  <a:solidFill>
+                    <a:srgbClr val="FFFFFF"/>
+                  </a:solidFill>
+                  <a:latin typeface="Segoe UI"/>
+                  <a:ea typeface="Segoe UI"/>
+                  <a:cs typeface="Segoe UI"/>
+                </a:endParaRPr>
               </a:p>
             </p:txBody>
           </p:sp>
@@ -3990,11 +4518,19 @@
                       <a:srgbClr val="64748B"/>
                     </a:solidFill>
                     <a:latin typeface="Segoe UI"/>
-                    <a:ea typeface="Microsoft YaHei"/>
+                    <a:ea typeface="微软雅黑"/>
                     <a:cs typeface="Segoe UI"/>
                   </a:rPr>
                   <a:t>技术方案与</a:t>
                 </a:r>
+                <a:endParaRPr lang="zh-CN" sz="980" dirty="0">
+                  <a:solidFill>
+                    <a:srgbClr val="64748B"/>
+                  </a:solidFill>
+                  <a:latin typeface="Segoe UI"/>
+                  <a:ea typeface="微软雅黑"/>
+                  <a:cs typeface="Segoe UI"/>
+                </a:endParaRPr>
               </a:p>
             </p:txBody>
           </p:sp>
@@ -4030,11 +4566,19 @@
                       <a:srgbClr val="64748B"/>
                     </a:solidFill>
                     <a:latin typeface="Segoe UI"/>
-                    <a:ea typeface="Microsoft YaHei"/>
+                    <a:ea typeface="微软雅黑"/>
                     <a:cs typeface="Segoe UI"/>
                   </a:rPr>
                   <a:t>创新点</a:t>
                 </a:r>
+                <a:endParaRPr lang="zh-CN" sz="980" dirty="0">
+                  <a:solidFill>
+                    <a:srgbClr val="64748B"/>
+                  </a:solidFill>
+                  <a:latin typeface="Segoe UI"/>
+                  <a:ea typeface="微软雅黑"/>
+                  <a:cs typeface="Segoe UI"/>
+                </a:endParaRPr>
               </a:p>
             </p:txBody>
           </p:sp>
@@ -4112,6 +4656,14 @@
                   </a:rPr>
                   <a:t>04</a:t>
                 </a:r>
+                <a:endParaRPr lang="en-US" sz="1050" b="1" dirty="0">
+                  <a:solidFill>
+                    <a:srgbClr val="FFFFFF"/>
+                  </a:solidFill>
+                  <a:latin typeface="Segoe UI"/>
+                  <a:ea typeface="Segoe UI"/>
+                  <a:cs typeface="Segoe UI"/>
+                </a:endParaRPr>
               </a:p>
             </p:txBody>
           </p:sp>
@@ -4147,11 +4699,19 @@
                       <a:srgbClr val="1E293B"/>
                     </a:solidFill>
                     <a:latin typeface="Segoe UI"/>
-                    <a:ea typeface="Microsoft YaHei"/>
+                    <a:ea typeface="微软雅黑"/>
                     <a:cs typeface="Segoe UI"/>
                   </a:rPr>
                   <a:t>应用规模</a:t>
                 </a:r>
+                <a:endParaRPr lang="zh-CN" sz="1050" b="1" dirty="0">
+                  <a:solidFill>
+                    <a:srgbClr val="1E293B"/>
+                  </a:solidFill>
+                  <a:latin typeface="Segoe UI"/>
+                  <a:ea typeface="微软雅黑"/>
+                  <a:cs typeface="Segoe UI"/>
+                </a:endParaRPr>
               </a:p>
             </p:txBody>
           </p:sp>
@@ -4164,7 +4724,7 @@
             <p:spPr>
               <a:xfrm>
                 <a:off x="6709791" y="524828"/>
-                <a:ext cx="307505" cy="205359"/>
+                <a:ext cx="267970" cy="161290"/>
               </a:xfrm>
               <a:prstGeom prst="rect">
                 <a:avLst/>
@@ -4187,11 +4747,19 @@
                       <a:srgbClr val="1E293B"/>
                     </a:solidFill>
                     <a:latin typeface="Segoe UI"/>
-                    <a:ea typeface="Microsoft YaHei"/>
-                    <a:cs typeface="Segoe UI"/>
-                  </a:rPr>
-                  <a:t>范本</a:t>
-                </a:r>
+                    <a:ea typeface="微软雅黑"/>
+                    <a:cs typeface="Segoe UI"/>
+                  </a:rPr>
+                  <a:t>范围</a:t>
+                </a:r>
+                <a:endParaRPr lang="zh-CN" sz="1050" b="1" dirty="0">
+                  <a:solidFill>
+                    <a:srgbClr val="1E293B"/>
+                  </a:solidFill>
+                  <a:latin typeface="Segoe UI"/>
+                  <a:ea typeface="微软雅黑"/>
+                  <a:cs typeface="Segoe UI"/>
+                </a:endParaRPr>
               </a:p>
             </p:txBody>
           </p:sp>
@@ -4305,6 +4873,14 @@
                   </a:rPr>
                   <a:t>05</a:t>
                 </a:r>
+                <a:endParaRPr lang="en-US" sz="900" b="1" dirty="0">
+                  <a:solidFill>
+                    <a:srgbClr val="FFFFFF"/>
+                  </a:solidFill>
+                  <a:latin typeface="Segoe UI"/>
+                  <a:ea typeface="Segoe UI"/>
+                  <a:cs typeface="Segoe UI"/>
+                </a:endParaRPr>
               </a:p>
             </p:txBody>
           </p:sp>
@@ -4340,11 +4916,19 @@
                       <a:srgbClr val="64748B"/>
                     </a:solidFill>
                     <a:latin typeface="Segoe UI"/>
-                    <a:ea typeface="Microsoft YaHei"/>
+                    <a:ea typeface="微软雅黑"/>
                     <a:cs typeface="Segoe UI"/>
                   </a:rPr>
                   <a:t>应用效果与</a:t>
                 </a:r>
+                <a:endParaRPr lang="zh-CN" sz="980" dirty="0">
+                  <a:solidFill>
+                    <a:srgbClr val="64748B"/>
+                  </a:solidFill>
+                  <a:latin typeface="Segoe UI"/>
+                  <a:ea typeface="微软雅黑"/>
+                  <a:cs typeface="Segoe UI"/>
+                </a:endParaRPr>
               </a:p>
             </p:txBody>
           </p:sp>
@@ -4380,11 +4964,19 @@
                       <a:srgbClr val="64748B"/>
                     </a:solidFill>
                     <a:latin typeface="Segoe UI"/>
-                    <a:ea typeface="Microsoft YaHei"/>
+                    <a:ea typeface="微软雅黑"/>
                     <a:cs typeface="Segoe UI"/>
                   </a:rPr>
                   <a:t>量化成效</a:t>
                 </a:r>
+                <a:endParaRPr lang="zh-CN" sz="980" dirty="0">
+                  <a:solidFill>
+                    <a:srgbClr val="64748B"/>
+                  </a:solidFill>
+                  <a:latin typeface="Segoe UI"/>
+                  <a:ea typeface="微软雅黑"/>
+                  <a:cs typeface="Segoe UI"/>
+                </a:endParaRPr>
               </a:p>
             </p:txBody>
           </p:sp>
@@ -4462,6 +5054,14 @@
                   </a:rPr>
                   <a:t>06</a:t>
                 </a:r>
+                <a:endParaRPr lang="en-US" sz="900" b="1" dirty="0">
+                  <a:solidFill>
+                    <a:srgbClr val="FFFFFF"/>
+                  </a:solidFill>
+                  <a:latin typeface="Segoe UI"/>
+                  <a:ea typeface="Segoe UI"/>
+                  <a:cs typeface="Segoe UI"/>
+                </a:endParaRPr>
               </a:p>
             </p:txBody>
           </p:sp>
@@ -4497,11 +5097,19 @@
                       <a:srgbClr val="64748B"/>
                     </a:solidFill>
                     <a:latin typeface="Segoe UI"/>
-                    <a:ea typeface="Microsoft YaHei"/>
+                    <a:ea typeface="微软雅黑"/>
                     <a:cs typeface="Segoe UI"/>
                   </a:rPr>
                   <a:t>应用价值与</a:t>
                 </a:r>
+                <a:endParaRPr lang="zh-CN" sz="980" dirty="0">
+                  <a:solidFill>
+                    <a:srgbClr val="64748B"/>
+                  </a:solidFill>
+                  <a:latin typeface="Segoe UI"/>
+                  <a:ea typeface="微软雅黑"/>
+                  <a:cs typeface="Segoe UI"/>
+                </a:endParaRPr>
               </a:p>
             </p:txBody>
           </p:sp>
@@ -4537,11 +5145,19 @@
                       <a:srgbClr val="64748B"/>
                     </a:solidFill>
                     <a:latin typeface="Segoe UI"/>
-                    <a:ea typeface="Microsoft YaHei"/>
+                    <a:ea typeface="微软雅黑"/>
                     <a:cs typeface="Segoe UI"/>
                   </a:rPr>
                   <a:t>市场前景</a:t>
                 </a:r>
+                <a:endParaRPr lang="zh-CN" sz="980" dirty="0">
+                  <a:solidFill>
+                    <a:srgbClr val="64748B"/>
+                  </a:solidFill>
+                  <a:latin typeface="Segoe UI"/>
+                  <a:ea typeface="微软雅黑"/>
+                  <a:cs typeface="Segoe UI"/>
+                </a:endParaRPr>
               </a:p>
             </p:txBody>
           </p:sp>
@@ -4552,9 +5168,18 @@
   <p:clrMapOvr>
     <a:masterClrMapping/>
   </p:clrMapOvr>
-  <p:transition xmlns:p14="http://schemas.microsoft.com/office/powerpoint/2010/main" p14:dur="400">
-    <p:fade/>
-  </p:transition>
+  <mc:AlternateContent xmlns:mc="http://schemas.openxmlformats.org/markup-compatibility/2006">
+    <mc:Choice xmlns:p14="http://schemas.microsoft.com/office/powerpoint/2010/main" Requires="p14">
+      <p:transition p14:dur="400">
+        <p:fade/>
+      </p:transition>
+    </mc:Choice>
+    <mc:Fallback>
+      <p:transition>
+        <p:fade/>
+      </p:transition>
+    </mc:Fallback>
+  </mc:AlternateContent>
 </p:sld>
 </file>
 
@@ -4670,6 +5295,14 @@
                   </a:rPr>
                   <a:t>01</a:t>
                 </a:r>
+                <a:endParaRPr lang="en-US" sz="900" b="1" dirty="0">
+                  <a:solidFill>
+                    <a:srgbClr val="FFFFFF"/>
+                  </a:solidFill>
+                  <a:latin typeface="Segoe UI"/>
+                  <a:ea typeface="Segoe UI"/>
+                  <a:cs typeface="Segoe UI"/>
+                </a:endParaRPr>
               </a:p>
             </p:txBody>
           </p:sp>
@@ -4705,11 +5338,19 @@
                       <a:srgbClr val="64748B"/>
                     </a:solidFill>
                     <a:latin typeface="Segoe UI"/>
-                    <a:ea typeface="Microsoft YaHei"/>
+                    <a:ea typeface="微软雅黑"/>
                     <a:cs typeface="Segoe UI"/>
                   </a:rPr>
                   <a:t>核心问题</a:t>
                 </a:r>
+                <a:endParaRPr lang="zh-CN" sz="980" dirty="0">
+                  <a:solidFill>
+                    <a:srgbClr val="64748B"/>
+                  </a:solidFill>
+                  <a:latin typeface="Segoe UI"/>
+                  <a:ea typeface="微软雅黑"/>
+                  <a:cs typeface="Segoe UI"/>
+                </a:endParaRPr>
               </a:p>
             </p:txBody>
           </p:sp>
@@ -4723,9 +5364,9 @@
           <p:grpSpPr>
             <a:xfrm>
               <a:off x="2514600" y="371475"/>
-              <a:ext cx="1026541" cy="352139"/>
+              <a:ext cx="1011800" cy="352139"/>
               <a:chOff x="2514600" y="371475"/>
-              <a:chExt cx="1026541" cy="352139"/>
+              <a:chExt cx="1011800" cy="352139"/>
             </a:xfrm>
           </p:grpSpPr>
           <p:sp>
@@ -4787,6 +5428,14 @@
                   </a:rPr>
                   <a:t>02</a:t>
                 </a:r>
+                <a:endParaRPr lang="en-US" sz="900" b="1" dirty="0">
+                  <a:solidFill>
+                    <a:srgbClr val="FFFFFF"/>
+                  </a:solidFill>
+                  <a:latin typeface="Segoe UI"/>
+                  <a:ea typeface="Segoe UI"/>
+                  <a:cs typeface="Segoe UI"/>
+                </a:endParaRPr>
               </a:p>
             </p:txBody>
           </p:sp>
@@ -4798,8 +5447,8 @@
             </p:nvSpPr>
             <p:spPr>
               <a:xfrm>
-                <a:off x="2871597" y="390049"/>
-                <a:ext cx="669544" cy="190690"/>
+                <a:off x="2655180" y="390049"/>
+                <a:ext cx="871220" cy="150495"/>
               </a:xfrm>
               <a:prstGeom prst="rect">
                 <a:avLst/>
@@ -4822,11 +5471,30 @@
                       <a:srgbClr val="64748B"/>
                     </a:solidFill>
                     <a:latin typeface="Segoe UI"/>
-                    <a:ea typeface="Microsoft YaHei"/>
+                    <a:ea typeface="微软雅黑"/>
                     <a:cs typeface="Segoe UI"/>
                   </a:rPr>
                   <a:t>数据来源与</a:t>
                 </a:r>
+                <a:r>
+                  <a:rPr lang="zh-CN" sz="980" dirty="0">
+                    <a:solidFill>
+                      <a:srgbClr val="64748B"/>
+                    </a:solidFill>
+                    <a:latin typeface="Segoe UI"/>
+                    <a:ea typeface="微软雅黑"/>
+                    <a:cs typeface="Segoe UI"/>
+                  </a:rPr>
+                  <a:t>要素</a:t>
+                </a:r>
+                <a:endParaRPr lang="zh-CN" sz="980" dirty="0">
+                  <a:solidFill>
+                    <a:srgbClr val="64748B"/>
+                  </a:solidFill>
+                  <a:latin typeface="Segoe UI"/>
+                  <a:ea typeface="微软雅黑"/>
+                  <a:cs typeface="Segoe UI"/>
+                </a:endParaRPr>
               </a:p>
             </p:txBody>
           </p:sp>
@@ -4862,11 +5530,19 @@
                       <a:srgbClr val="64748B"/>
                     </a:solidFill>
                     <a:latin typeface="Segoe UI"/>
-                    <a:ea typeface="Microsoft YaHei"/>
+                    <a:ea typeface="微软雅黑"/>
                     <a:cs typeface="Segoe UI"/>
                   </a:rPr>
                   <a:t>利用方式</a:t>
                 </a:r>
+                <a:endParaRPr lang="zh-CN" sz="980" dirty="0">
+                  <a:solidFill>
+                    <a:srgbClr val="64748B"/>
+                  </a:solidFill>
+                  <a:latin typeface="Segoe UI"/>
+                  <a:ea typeface="微软雅黑"/>
+                  <a:cs typeface="Segoe UI"/>
+                </a:endParaRPr>
               </a:p>
             </p:txBody>
           </p:sp>
@@ -4944,6 +5620,14 @@
                   </a:rPr>
                   <a:t>03</a:t>
                 </a:r>
+                <a:endParaRPr lang="en-US" sz="900" b="1" dirty="0">
+                  <a:solidFill>
+                    <a:srgbClr val="FFFFFF"/>
+                  </a:solidFill>
+                  <a:latin typeface="Segoe UI"/>
+                  <a:ea typeface="Segoe UI"/>
+                  <a:cs typeface="Segoe UI"/>
+                </a:endParaRPr>
               </a:p>
             </p:txBody>
           </p:sp>
@@ -4979,11 +5663,19 @@
                       <a:srgbClr val="64748B"/>
                     </a:solidFill>
                     <a:latin typeface="Segoe UI"/>
-                    <a:ea typeface="Microsoft YaHei"/>
+                    <a:ea typeface="微软雅黑"/>
                     <a:cs typeface="Segoe UI"/>
                   </a:rPr>
                   <a:t>技术方案与</a:t>
                 </a:r>
+                <a:endParaRPr lang="zh-CN" sz="980" dirty="0">
+                  <a:solidFill>
+                    <a:srgbClr val="64748B"/>
+                  </a:solidFill>
+                  <a:latin typeface="Segoe UI"/>
+                  <a:ea typeface="微软雅黑"/>
+                  <a:cs typeface="Segoe UI"/>
+                </a:endParaRPr>
               </a:p>
             </p:txBody>
           </p:sp>
@@ -5019,11 +5711,19 @@
                       <a:srgbClr val="64748B"/>
                     </a:solidFill>
                     <a:latin typeface="Segoe UI"/>
-                    <a:ea typeface="Microsoft YaHei"/>
+                    <a:ea typeface="微软雅黑"/>
                     <a:cs typeface="Segoe UI"/>
                   </a:rPr>
                   <a:t>创新点</a:t>
                 </a:r>
+                <a:endParaRPr lang="zh-CN" sz="980" dirty="0">
+                  <a:solidFill>
+                    <a:srgbClr val="64748B"/>
+                  </a:solidFill>
+                  <a:latin typeface="Segoe UI"/>
+                  <a:ea typeface="微软雅黑"/>
+                  <a:cs typeface="Segoe UI"/>
+                </a:endParaRPr>
               </a:p>
             </p:txBody>
           </p:sp>
@@ -5037,9 +5737,9 @@
           <p:grpSpPr>
             <a:xfrm>
               <a:off x="6324600" y="371475"/>
-              <a:ext cx="894613" cy="352139"/>
+              <a:ext cx="894613" cy="311944"/>
               <a:chOff x="6324600" y="371475"/>
-              <a:chExt cx="894613" cy="352139"/>
+              <a:chExt cx="894613" cy="311944"/>
             </a:xfrm>
           </p:grpSpPr>
           <p:sp>
@@ -5101,6 +5801,14 @@
                   </a:rPr>
                   <a:t>04</a:t>
                 </a:r>
+                <a:endParaRPr lang="en-US" sz="900" b="1" dirty="0">
+                  <a:solidFill>
+                    <a:srgbClr val="FFFFFF"/>
+                  </a:solidFill>
+                  <a:latin typeface="Segoe UI"/>
+                  <a:ea typeface="Segoe UI"/>
+                  <a:cs typeface="Segoe UI"/>
+                </a:endParaRPr>
               </a:p>
             </p:txBody>
           </p:sp>
@@ -5136,11 +5844,19 @@
                       <a:srgbClr val="64748B"/>
                     </a:solidFill>
                     <a:latin typeface="Segoe UI"/>
-                    <a:ea typeface="Microsoft YaHei"/>
+                    <a:ea typeface="微软雅黑"/>
                     <a:cs typeface="Segoe UI"/>
                   </a:rPr>
                   <a:t>应用规模</a:t>
                 </a:r>
+                <a:endParaRPr lang="zh-CN" sz="980" dirty="0">
+                  <a:solidFill>
+                    <a:srgbClr val="64748B"/>
+                  </a:solidFill>
+                  <a:latin typeface="Segoe UI"/>
+                  <a:ea typeface="微软雅黑"/>
+                  <a:cs typeface="Segoe UI"/>
+                </a:endParaRPr>
               </a:p>
             </p:txBody>
           </p:sp>
@@ -5153,7 +5869,7 @@
             <p:spPr>
               <a:xfrm>
                 <a:off x="6681597" y="532924"/>
-                <a:ext cx="273761" cy="190690"/>
+                <a:ext cx="248920" cy="150495"/>
               </a:xfrm>
               <a:prstGeom prst="rect">
                 <a:avLst/>
@@ -5176,11 +5892,19 @@
                       <a:srgbClr val="64748B"/>
                     </a:solidFill>
                     <a:latin typeface="Segoe UI"/>
-                    <a:ea typeface="Microsoft YaHei"/>
-                    <a:cs typeface="Segoe UI"/>
-                  </a:rPr>
-                  <a:t>范本</a:t>
-                </a:r>
+                    <a:ea typeface="微软雅黑"/>
+                    <a:cs typeface="Segoe UI"/>
+                  </a:rPr>
+                  <a:t>范围</a:t>
+                </a:r>
+                <a:endParaRPr lang="zh-CN" sz="980" dirty="0">
+                  <a:solidFill>
+                    <a:srgbClr val="64748B"/>
+                  </a:solidFill>
+                  <a:latin typeface="Segoe UI"/>
+                  <a:ea typeface="微软雅黑"/>
+                  <a:cs typeface="Segoe UI"/>
+                </a:endParaRPr>
               </a:p>
             </p:txBody>
           </p:sp>
@@ -5258,6 +5982,14 @@
                   </a:rPr>
                   <a:t>05</a:t>
                 </a:r>
+                <a:endParaRPr lang="en-US" sz="1050" b="1" dirty="0">
+                  <a:solidFill>
+                    <a:srgbClr val="FFFFFF"/>
+                  </a:solidFill>
+                  <a:latin typeface="Segoe UI"/>
+                  <a:ea typeface="Segoe UI"/>
+                  <a:cs typeface="Segoe UI"/>
+                </a:endParaRPr>
               </a:p>
             </p:txBody>
           </p:sp>
@@ -5293,11 +6025,19 @@
                       <a:srgbClr val="1E293B"/>
                     </a:solidFill>
                     <a:latin typeface="Segoe UI"/>
-                    <a:ea typeface="Microsoft YaHei"/>
+                    <a:ea typeface="微软雅黑"/>
                     <a:cs typeface="Segoe UI"/>
                   </a:rPr>
                   <a:t>应用效果与</a:t>
                 </a:r>
+                <a:endParaRPr lang="zh-CN" sz="1050" b="1" dirty="0">
+                  <a:solidFill>
+                    <a:srgbClr val="1E293B"/>
+                  </a:solidFill>
+                  <a:latin typeface="Segoe UI"/>
+                  <a:ea typeface="微软雅黑"/>
+                  <a:cs typeface="Segoe UI"/>
+                </a:endParaRPr>
               </a:p>
             </p:txBody>
           </p:sp>
@@ -5333,11 +6073,19 @@
                       <a:srgbClr val="1E293B"/>
                     </a:solidFill>
                     <a:latin typeface="Segoe UI"/>
-                    <a:ea typeface="Microsoft YaHei"/>
+                    <a:ea typeface="微软雅黑"/>
                     <a:cs typeface="Segoe UI"/>
                   </a:rPr>
                   <a:t>量化成效</a:t>
                 </a:r>
+                <a:endParaRPr lang="zh-CN" sz="1050" b="1" dirty="0">
+                  <a:solidFill>
+                    <a:srgbClr val="1E293B"/>
+                  </a:solidFill>
+                  <a:latin typeface="Segoe UI"/>
+                  <a:ea typeface="微软雅黑"/>
+                  <a:cs typeface="Segoe UI"/>
+                </a:endParaRPr>
               </a:p>
             </p:txBody>
           </p:sp>
@@ -5451,6 +6199,14 @@
                   </a:rPr>
                   <a:t>06</a:t>
                 </a:r>
+                <a:endParaRPr lang="en-US" sz="900" b="1" dirty="0">
+                  <a:solidFill>
+                    <a:srgbClr val="FFFFFF"/>
+                  </a:solidFill>
+                  <a:latin typeface="Segoe UI"/>
+                  <a:ea typeface="Segoe UI"/>
+                  <a:cs typeface="Segoe UI"/>
+                </a:endParaRPr>
               </a:p>
             </p:txBody>
           </p:sp>
@@ -5486,11 +6242,19 @@
                       <a:srgbClr val="64748B"/>
                     </a:solidFill>
                     <a:latin typeface="Segoe UI"/>
-                    <a:ea typeface="Microsoft YaHei"/>
+                    <a:ea typeface="微软雅黑"/>
                     <a:cs typeface="Segoe UI"/>
                   </a:rPr>
                   <a:t>应用价值与</a:t>
                 </a:r>
+                <a:endParaRPr lang="zh-CN" sz="980" dirty="0">
+                  <a:solidFill>
+                    <a:srgbClr val="64748B"/>
+                  </a:solidFill>
+                  <a:latin typeface="Segoe UI"/>
+                  <a:ea typeface="微软雅黑"/>
+                  <a:cs typeface="Segoe UI"/>
+                </a:endParaRPr>
               </a:p>
             </p:txBody>
           </p:sp>
@@ -5526,11 +6290,19 @@
                       <a:srgbClr val="64748B"/>
                     </a:solidFill>
                     <a:latin typeface="Segoe UI"/>
-                    <a:ea typeface="Microsoft YaHei"/>
+                    <a:ea typeface="微软雅黑"/>
                     <a:cs typeface="Segoe UI"/>
                   </a:rPr>
                   <a:t>市场前景</a:t>
                 </a:r>
+                <a:endParaRPr lang="zh-CN" sz="980" dirty="0">
+                  <a:solidFill>
+                    <a:srgbClr val="64748B"/>
+                  </a:solidFill>
+                  <a:latin typeface="Segoe UI"/>
+                  <a:ea typeface="微软雅黑"/>
+                  <a:cs typeface="Segoe UI"/>
+                </a:endParaRPr>
               </a:p>
             </p:txBody>
           </p:sp>
@@ -5541,9 +6313,18 @@
   <p:clrMapOvr>
     <a:masterClrMapping/>
   </p:clrMapOvr>
-  <p:transition xmlns:p14="http://schemas.microsoft.com/office/powerpoint/2010/main" p14:dur="400">
-    <p:fade/>
-  </p:transition>
+  <mc:AlternateContent xmlns:mc="http://schemas.openxmlformats.org/markup-compatibility/2006">
+    <mc:Choice xmlns:p14="http://schemas.microsoft.com/office/powerpoint/2010/main" Requires="p14">
+      <p:transition p14:dur="400">
+        <p:fade/>
+      </p:transition>
+    </mc:Choice>
+    <mc:Fallback>
+      <p:transition>
+        <p:fade/>
+      </p:transition>
+    </mc:Fallback>
+  </mc:AlternateContent>
 </p:sld>
 </file>
 
@@ -5659,6 +6440,14 @@
                   </a:rPr>
                   <a:t>01</a:t>
                 </a:r>
+                <a:endParaRPr lang="en-US" sz="900" b="1" dirty="0">
+                  <a:solidFill>
+                    <a:srgbClr val="FFFFFF"/>
+                  </a:solidFill>
+                  <a:latin typeface="Segoe UI"/>
+                  <a:ea typeface="Segoe UI"/>
+                  <a:cs typeface="Segoe UI"/>
+                </a:endParaRPr>
               </a:p>
             </p:txBody>
           </p:sp>
@@ -5694,11 +6483,19 @@
                       <a:srgbClr val="64748B"/>
                     </a:solidFill>
                     <a:latin typeface="Segoe UI"/>
-                    <a:ea typeface="Microsoft YaHei"/>
+                    <a:ea typeface="微软雅黑"/>
                     <a:cs typeface="Segoe UI"/>
                   </a:rPr>
                   <a:t>核心问题</a:t>
                 </a:r>
+                <a:endParaRPr lang="zh-CN" sz="980" dirty="0">
+                  <a:solidFill>
+                    <a:srgbClr val="64748B"/>
+                  </a:solidFill>
+                  <a:latin typeface="Segoe UI"/>
+                  <a:ea typeface="微软雅黑"/>
+                  <a:cs typeface="Segoe UI"/>
+                </a:endParaRPr>
               </a:p>
             </p:txBody>
           </p:sp>
@@ -5712,9 +6509,9 @@
           <p:grpSpPr>
             <a:xfrm>
               <a:off x="2514600" y="371475"/>
-              <a:ext cx="1026541" cy="352139"/>
+              <a:ext cx="1234868" cy="351790"/>
               <a:chOff x="2514600" y="371475"/>
-              <a:chExt cx="1026541" cy="352139"/>
+              <a:chExt cx="1234868" cy="351790"/>
             </a:xfrm>
           </p:grpSpPr>
           <p:sp>
@@ -5776,6 +6573,14 @@
                   </a:rPr>
                   <a:t>02</a:t>
                 </a:r>
+                <a:endParaRPr lang="en-US" sz="900" b="1" dirty="0">
+                  <a:solidFill>
+                    <a:srgbClr val="FFFFFF"/>
+                  </a:solidFill>
+                  <a:latin typeface="Segoe UI"/>
+                  <a:ea typeface="Segoe UI"/>
+                  <a:cs typeface="Segoe UI"/>
+                </a:endParaRPr>
               </a:p>
             </p:txBody>
           </p:sp>
@@ -5787,8 +6592,8 @@
             </p:nvSpPr>
             <p:spPr>
               <a:xfrm>
-                <a:off x="2871597" y="390049"/>
-                <a:ext cx="669544" cy="190690"/>
+                <a:off x="2878248" y="390049"/>
+                <a:ext cx="871220" cy="150495"/>
               </a:xfrm>
               <a:prstGeom prst="rect">
                 <a:avLst/>
@@ -5811,11 +6616,30 @@
                       <a:srgbClr val="64748B"/>
                     </a:solidFill>
                     <a:latin typeface="Segoe UI"/>
-                    <a:ea typeface="Microsoft YaHei"/>
+                    <a:ea typeface="微软雅黑"/>
                     <a:cs typeface="Segoe UI"/>
                   </a:rPr>
                   <a:t>数据来源与</a:t>
                 </a:r>
+                <a:r>
+                  <a:rPr lang="zh-CN" sz="980" dirty="0">
+                    <a:solidFill>
+                      <a:srgbClr val="64748B"/>
+                    </a:solidFill>
+                    <a:latin typeface="Segoe UI"/>
+                    <a:ea typeface="微软雅黑"/>
+                    <a:cs typeface="Segoe UI"/>
+                  </a:rPr>
+                  <a:t>要素</a:t>
+                </a:r>
+                <a:endParaRPr lang="zh-CN" sz="980" dirty="0">
+                  <a:solidFill>
+                    <a:srgbClr val="64748B"/>
+                  </a:solidFill>
+                  <a:latin typeface="Segoe UI"/>
+                  <a:ea typeface="微软雅黑"/>
+                  <a:cs typeface="Segoe UI"/>
+                </a:endParaRPr>
               </a:p>
             </p:txBody>
           </p:sp>
@@ -5827,20 +6651,20 @@
             </p:nvSpPr>
             <p:spPr>
               <a:xfrm>
-                <a:off x="2871597" y="532924"/>
-                <a:ext cx="537616" cy="190690"/>
-              </a:xfrm>
-              <a:prstGeom prst="rect">
-                <a:avLst/>
-              </a:prstGeom>
-              <a:noFill/>
-              <a:ln>
-                <a:noFill/>
-              </a:ln>
-            </p:spPr>
-            <p:txBody>
-              <a:bodyPr wrap="none" lIns="0" tIns="0" rIns="0" bIns="0" anchor="t" anchorCtr="0">
-                <a:spAutoFit/>
+                <a:off x="2871470" y="532765"/>
+                <a:ext cx="537845" cy="190500"/>
+              </a:xfrm>
+              <a:prstGeom prst="rect">
+                <a:avLst/>
+              </a:prstGeom>
+              <a:noFill/>
+              <a:ln>
+                <a:noFill/>
+              </a:ln>
+            </p:spPr>
+            <p:txBody>
+              <a:bodyPr wrap="none" lIns="0" tIns="0" rIns="0" bIns="0" anchor="t" anchorCtr="0">
+                <a:noAutofit/>
               </a:bodyPr>
               <a:lstStyle/>
               <a:p>
@@ -5851,11 +6675,19 @@
                       <a:srgbClr val="64748B"/>
                     </a:solidFill>
                     <a:latin typeface="Segoe UI"/>
-                    <a:ea typeface="Microsoft YaHei"/>
+                    <a:ea typeface="微软雅黑"/>
                     <a:cs typeface="Segoe UI"/>
                   </a:rPr>
                   <a:t>利用方式</a:t>
                 </a:r>
+                <a:endParaRPr lang="zh-CN" sz="980" dirty="0">
+                  <a:solidFill>
+                    <a:srgbClr val="64748B"/>
+                  </a:solidFill>
+                  <a:latin typeface="Segoe UI"/>
+                  <a:ea typeface="微软雅黑"/>
+                  <a:cs typeface="Segoe UI"/>
+                </a:endParaRPr>
               </a:p>
             </p:txBody>
           </p:sp>
@@ -5933,6 +6765,14 @@
                   </a:rPr>
                   <a:t>03</a:t>
                 </a:r>
+                <a:endParaRPr lang="en-US" sz="900" b="1" dirty="0">
+                  <a:solidFill>
+                    <a:srgbClr val="FFFFFF"/>
+                  </a:solidFill>
+                  <a:latin typeface="Segoe UI"/>
+                  <a:ea typeface="Segoe UI"/>
+                  <a:cs typeface="Segoe UI"/>
+                </a:endParaRPr>
               </a:p>
             </p:txBody>
           </p:sp>
@@ -5968,11 +6808,19 @@
                       <a:srgbClr val="64748B"/>
                     </a:solidFill>
                     <a:latin typeface="Segoe UI"/>
-                    <a:ea typeface="Microsoft YaHei"/>
+                    <a:ea typeface="微软雅黑"/>
                     <a:cs typeface="Segoe UI"/>
                   </a:rPr>
                   <a:t>技术方案与</a:t>
                 </a:r>
+                <a:endParaRPr lang="zh-CN" sz="980" dirty="0">
+                  <a:solidFill>
+                    <a:srgbClr val="64748B"/>
+                  </a:solidFill>
+                  <a:latin typeface="Segoe UI"/>
+                  <a:ea typeface="微软雅黑"/>
+                  <a:cs typeface="Segoe UI"/>
+                </a:endParaRPr>
               </a:p>
             </p:txBody>
           </p:sp>
@@ -6008,11 +6856,19 @@
                       <a:srgbClr val="64748B"/>
                     </a:solidFill>
                     <a:latin typeface="Segoe UI"/>
-                    <a:ea typeface="Microsoft YaHei"/>
+                    <a:ea typeface="微软雅黑"/>
                     <a:cs typeface="Segoe UI"/>
                   </a:rPr>
                   <a:t>创新点</a:t>
                 </a:r>
+                <a:endParaRPr lang="zh-CN" sz="980" dirty="0">
+                  <a:solidFill>
+                    <a:srgbClr val="64748B"/>
+                  </a:solidFill>
+                  <a:latin typeface="Segoe UI"/>
+                  <a:ea typeface="微软雅黑"/>
+                  <a:cs typeface="Segoe UI"/>
+                </a:endParaRPr>
               </a:p>
             </p:txBody>
           </p:sp>
@@ -6026,9 +6882,9 @@
           <p:grpSpPr>
             <a:xfrm>
               <a:off x="6324600" y="371475"/>
-              <a:ext cx="894613" cy="352139"/>
+              <a:ext cx="894613" cy="311944"/>
               <a:chOff x="6324600" y="371475"/>
-              <a:chExt cx="894613" cy="352139"/>
+              <a:chExt cx="894613" cy="311944"/>
             </a:xfrm>
           </p:grpSpPr>
           <p:sp>
@@ -6090,6 +6946,14 @@
                   </a:rPr>
                   <a:t>04</a:t>
                 </a:r>
+                <a:endParaRPr lang="en-US" sz="900" b="1" dirty="0">
+                  <a:solidFill>
+                    <a:srgbClr val="FFFFFF"/>
+                  </a:solidFill>
+                  <a:latin typeface="Segoe UI"/>
+                  <a:ea typeface="Segoe UI"/>
+                  <a:cs typeface="Segoe UI"/>
+                </a:endParaRPr>
               </a:p>
             </p:txBody>
           </p:sp>
@@ -6125,11 +6989,19 @@
                       <a:srgbClr val="64748B"/>
                     </a:solidFill>
                     <a:latin typeface="Segoe UI"/>
-                    <a:ea typeface="Microsoft YaHei"/>
+                    <a:ea typeface="微软雅黑"/>
                     <a:cs typeface="Segoe UI"/>
                   </a:rPr>
                   <a:t>应用规模</a:t>
                 </a:r>
+                <a:endParaRPr lang="zh-CN" sz="980" dirty="0">
+                  <a:solidFill>
+                    <a:srgbClr val="64748B"/>
+                  </a:solidFill>
+                  <a:latin typeface="Segoe UI"/>
+                  <a:ea typeface="微软雅黑"/>
+                  <a:cs typeface="Segoe UI"/>
+                </a:endParaRPr>
               </a:p>
             </p:txBody>
           </p:sp>
@@ -6142,7 +7014,7 @@
             <p:spPr>
               <a:xfrm>
                 <a:off x="6681597" y="532924"/>
-                <a:ext cx="273761" cy="190690"/>
+                <a:ext cx="248920" cy="150495"/>
               </a:xfrm>
               <a:prstGeom prst="rect">
                 <a:avLst/>
@@ -6165,11 +7037,19 @@
                       <a:srgbClr val="64748B"/>
                     </a:solidFill>
                     <a:latin typeface="Segoe UI"/>
-                    <a:ea typeface="Microsoft YaHei"/>
-                    <a:cs typeface="Segoe UI"/>
-                  </a:rPr>
-                  <a:t>范本</a:t>
-                </a:r>
+                    <a:ea typeface="微软雅黑"/>
+                    <a:cs typeface="Segoe UI"/>
+                  </a:rPr>
+                  <a:t>范围</a:t>
+                </a:r>
+                <a:endParaRPr lang="zh-CN" sz="980" dirty="0">
+                  <a:solidFill>
+                    <a:srgbClr val="64748B"/>
+                  </a:solidFill>
+                  <a:latin typeface="Segoe UI"/>
+                  <a:ea typeface="微软雅黑"/>
+                  <a:cs typeface="Segoe UI"/>
+                </a:endParaRPr>
               </a:p>
             </p:txBody>
           </p:sp>
@@ -6247,6 +7127,14 @@
                   </a:rPr>
                   <a:t>05</a:t>
                 </a:r>
+                <a:endParaRPr lang="en-US" sz="900" b="1" dirty="0">
+                  <a:solidFill>
+                    <a:srgbClr val="FFFFFF"/>
+                  </a:solidFill>
+                  <a:latin typeface="Segoe UI"/>
+                  <a:ea typeface="Segoe UI"/>
+                  <a:cs typeface="Segoe UI"/>
+                </a:endParaRPr>
               </a:p>
             </p:txBody>
           </p:sp>
@@ -6282,11 +7170,19 @@
                       <a:srgbClr val="64748B"/>
                     </a:solidFill>
                     <a:latin typeface="Segoe UI"/>
-                    <a:ea typeface="Microsoft YaHei"/>
+                    <a:ea typeface="微软雅黑"/>
                     <a:cs typeface="Segoe UI"/>
                   </a:rPr>
                   <a:t>应用效果与</a:t>
                 </a:r>
+                <a:endParaRPr lang="zh-CN" sz="980" dirty="0">
+                  <a:solidFill>
+                    <a:srgbClr val="64748B"/>
+                  </a:solidFill>
+                  <a:latin typeface="Segoe UI"/>
+                  <a:ea typeface="微软雅黑"/>
+                  <a:cs typeface="Segoe UI"/>
+                </a:endParaRPr>
               </a:p>
             </p:txBody>
           </p:sp>
@@ -6322,11 +7218,19 @@
                       <a:srgbClr val="64748B"/>
                     </a:solidFill>
                     <a:latin typeface="Segoe UI"/>
-                    <a:ea typeface="Microsoft YaHei"/>
+                    <a:ea typeface="微软雅黑"/>
                     <a:cs typeface="Segoe UI"/>
                   </a:rPr>
                   <a:t>量化成效</a:t>
                 </a:r>
+                <a:endParaRPr lang="zh-CN" sz="980" dirty="0">
+                  <a:solidFill>
+                    <a:srgbClr val="64748B"/>
+                  </a:solidFill>
+                  <a:latin typeface="Segoe UI"/>
+                  <a:ea typeface="微软雅黑"/>
+                  <a:cs typeface="Segoe UI"/>
+                </a:endParaRPr>
               </a:p>
             </p:txBody>
           </p:sp>
@@ -6404,6 +7308,14 @@
                   </a:rPr>
                   <a:t>06</a:t>
                 </a:r>
+                <a:endParaRPr lang="en-US" sz="1050" b="1" dirty="0">
+                  <a:solidFill>
+                    <a:srgbClr val="FFFFFF"/>
+                  </a:solidFill>
+                  <a:latin typeface="Segoe UI"/>
+                  <a:ea typeface="Segoe UI"/>
+                  <a:cs typeface="Segoe UI"/>
+                </a:endParaRPr>
               </a:p>
             </p:txBody>
           </p:sp>
@@ -6439,11 +7351,19 @@
                       <a:srgbClr val="1E293B"/>
                     </a:solidFill>
                     <a:latin typeface="Segoe UI"/>
-                    <a:ea typeface="Microsoft YaHei"/>
+                    <a:ea typeface="微软雅黑"/>
                     <a:cs typeface="Segoe UI"/>
                   </a:rPr>
                   <a:t>应用价值与</a:t>
                 </a:r>
+                <a:endParaRPr lang="zh-CN" sz="1050" b="1" dirty="0">
+                  <a:solidFill>
+                    <a:srgbClr val="1E293B"/>
+                  </a:solidFill>
+                  <a:latin typeface="Segoe UI"/>
+                  <a:ea typeface="微软雅黑"/>
+                  <a:cs typeface="Segoe UI"/>
+                </a:endParaRPr>
               </a:p>
             </p:txBody>
           </p:sp>
@@ -6479,11 +7399,19 @@
                       <a:srgbClr val="1E293B"/>
                     </a:solidFill>
                     <a:latin typeface="Segoe UI"/>
-                    <a:ea typeface="Microsoft YaHei"/>
+                    <a:ea typeface="微软雅黑"/>
                     <a:cs typeface="Segoe UI"/>
                   </a:rPr>
                   <a:t>市场前景</a:t>
                 </a:r>
+                <a:endParaRPr lang="zh-CN" sz="1050" b="1" dirty="0">
+                  <a:solidFill>
+                    <a:srgbClr val="1E293B"/>
+                  </a:solidFill>
+                  <a:latin typeface="Segoe UI"/>
+                  <a:ea typeface="微软雅黑"/>
+                  <a:cs typeface="Segoe UI"/>
+                </a:endParaRPr>
               </a:p>
             </p:txBody>
           </p:sp>
@@ -6530,9 +7458,18 @@
   <p:clrMapOvr>
     <a:masterClrMapping/>
   </p:clrMapOvr>
-  <p:transition xmlns:p14="http://schemas.microsoft.com/office/powerpoint/2010/main" p14:dur="400">
-    <p:fade/>
-  </p:transition>
+  <mc:AlternateContent xmlns:mc="http://schemas.openxmlformats.org/markup-compatibility/2006">
+    <mc:Choice xmlns:p14="http://schemas.microsoft.com/office/powerpoint/2010/main" Requires="p14">
+      <p:transition p14:dur="400">
+        <p:fade/>
+      </p:transition>
+    </mc:Choice>
+    <mc:Fallback>
+      <p:transition>
+        <p:fade/>
+      </p:transition>
+    </mc:Fallback>
+  </mc:AlternateContent>
 </p:sld>
 </file>
 
@@ -6852,6 +7789,10 @@
       </a:style>
     </a:lnDef>
   </a:objectDefaults>
-  <a:extraClrSchemeLst/>
+  <a:extLst>
+    <a:ext uri="{05A4C25C-085E-4340-85A3-A5531E510DB2}">
+      <thm15:themeFamily xmlns:thm15="http://schemas.microsoft.com/office/thememl/2012/main" name="Office Theme" id="{62F939B6-93AF-4DB8-9C6B-D6C7DFDC589F}" vid="{4A3C46E8-61CC-4603-A589-7422A47A8E4A}"/>
+    </a:ext>
+  </a:extLst>
 </a:theme>
 </file>